--- a/public/fun/cards/care/care-40.pptx
+++ b/public/fun/cards/care/care-40.pptx
@@ -3085,7 +3085,7 @@
     <p:bg>
       <p:bgPr>
         <a:solidFill>
-          <a:srgbClr val="FBF1EE"/>
+          <a:srgbClr val="0E1116"/>
         </a:solidFill>
         <a:effectLst/>
       </p:bgPr>
@@ -3099,692 +3099,14 @@
       <p:grpSpPr/>
       <p:sp>
         <p:nvSpPr>
-          <p:cNvPr id="2" name="Oval 1"/>
-          <p:cNvSpPr/>
+          <p:cNvPr id="2" name="텍스트"/>
+          <p:cNvSpPr txBox="1"/>
           <p:nvPr/>
         </p:nvSpPr>
         <p:spPr>
           <a:xfrm>
-            <a:off x="2462400" y="158400"/>
-            <a:ext cx="43200" cy="43200"/>
-          </a:xfrm>
-          <a:prstGeom prst="ellipse">
-            <a:avLst/>
-          </a:prstGeom>
-          <a:solidFill>
-            <a:srgbClr val="AE4329">
-              <a:alpha val="70000"/>
-            </a:srgbClr>
-          </a:solidFill>
-          <a:ln>
-            <a:noFill/>
-          </a:ln>
-        </p:spPr>
-        <p:txBody>
-          <a:bodyPr rtlCol="0" anchor="ctr"/>
-          <a:lstStyle/>
-          <a:p>
-            <a:pPr algn="ctr"/>
-          </a:p>
-        </p:txBody>
-      </p:sp>
-      <p:sp>
-        <p:nvSpPr>
-          <p:cNvPr id="3" name="Oval 2"/>
-          <p:cNvSpPr/>
-          <p:nvPr/>
-        </p:nvSpPr>
-        <p:spPr>
-          <a:xfrm>
-            <a:off x="2462400" y="266400"/>
-            <a:ext cx="43200" cy="43200"/>
-          </a:xfrm>
-          <a:prstGeom prst="ellipse">
-            <a:avLst/>
-          </a:prstGeom>
-          <a:solidFill>
-            <a:srgbClr val="AE4329">
-              <a:alpha val="57999"/>
-            </a:srgbClr>
-          </a:solidFill>
-          <a:ln>
-            <a:noFill/>
-          </a:ln>
-        </p:spPr>
-        <p:txBody>
-          <a:bodyPr rtlCol="0" anchor="ctr"/>
-          <a:lstStyle/>
-          <a:p>
-            <a:pPr algn="ctr"/>
-          </a:p>
-        </p:txBody>
-      </p:sp>
-      <p:sp>
-        <p:nvSpPr>
-          <p:cNvPr id="4" name="Oval 3"/>
-          <p:cNvSpPr/>
-          <p:nvPr/>
-        </p:nvSpPr>
-        <p:spPr>
-          <a:xfrm>
-            <a:off x="2462400" y="374400"/>
-            <a:ext cx="43200" cy="43200"/>
-          </a:xfrm>
-          <a:prstGeom prst="ellipse">
-            <a:avLst/>
-          </a:prstGeom>
-          <a:solidFill>
-            <a:srgbClr val="AE4329">
-              <a:alpha val="46000"/>
-            </a:srgbClr>
-          </a:solidFill>
-          <a:ln>
-            <a:noFill/>
-          </a:ln>
-        </p:spPr>
-        <p:txBody>
-          <a:bodyPr rtlCol="0" anchor="ctr"/>
-          <a:lstStyle/>
-          <a:p>
-            <a:pPr algn="ctr"/>
-          </a:p>
-        </p:txBody>
-      </p:sp>
-      <p:sp>
-        <p:nvSpPr>
-          <p:cNvPr id="5" name="Oval 4"/>
-          <p:cNvSpPr/>
-          <p:nvPr/>
-        </p:nvSpPr>
-        <p:spPr>
-          <a:xfrm>
-            <a:off x="2462400" y="482400"/>
-            <a:ext cx="43200" cy="43200"/>
-          </a:xfrm>
-          <a:prstGeom prst="ellipse">
-            <a:avLst/>
-          </a:prstGeom>
-          <a:solidFill>
-            <a:srgbClr val="AE4329">
-              <a:alpha val="34000"/>
-            </a:srgbClr>
-          </a:solidFill>
-          <a:ln>
-            <a:noFill/>
-          </a:ln>
-        </p:spPr>
-        <p:txBody>
-          <a:bodyPr rtlCol="0" anchor="ctr"/>
-          <a:lstStyle/>
-          <a:p>
-            <a:pPr algn="ctr"/>
-          </a:p>
-        </p:txBody>
-      </p:sp>
-      <p:sp>
-        <p:nvSpPr>
-          <p:cNvPr id="6" name="Oval 5"/>
-          <p:cNvSpPr/>
-          <p:nvPr/>
-        </p:nvSpPr>
-        <p:spPr>
-          <a:xfrm>
-            <a:off x="2570400" y="158400"/>
-            <a:ext cx="43200" cy="43200"/>
-          </a:xfrm>
-          <a:prstGeom prst="ellipse">
-            <a:avLst/>
-          </a:prstGeom>
-          <a:solidFill>
-            <a:srgbClr val="AE4329">
-              <a:alpha val="70000"/>
-            </a:srgbClr>
-          </a:solidFill>
-          <a:ln>
-            <a:noFill/>
-          </a:ln>
-        </p:spPr>
-        <p:txBody>
-          <a:bodyPr rtlCol="0" anchor="ctr"/>
-          <a:lstStyle/>
-          <a:p>
-            <a:pPr algn="ctr"/>
-          </a:p>
-        </p:txBody>
-      </p:sp>
-      <p:sp>
-        <p:nvSpPr>
-          <p:cNvPr id="7" name="Oval 6"/>
-          <p:cNvSpPr/>
-          <p:nvPr/>
-        </p:nvSpPr>
-        <p:spPr>
-          <a:xfrm>
-            <a:off x="2570400" y="266400"/>
-            <a:ext cx="43200" cy="43200"/>
-          </a:xfrm>
-          <a:prstGeom prst="ellipse">
-            <a:avLst/>
-          </a:prstGeom>
-          <a:solidFill>
-            <a:srgbClr val="AE4329">
-              <a:alpha val="57999"/>
-            </a:srgbClr>
-          </a:solidFill>
-          <a:ln>
-            <a:noFill/>
-          </a:ln>
-        </p:spPr>
-        <p:txBody>
-          <a:bodyPr rtlCol="0" anchor="ctr"/>
-          <a:lstStyle/>
-          <a:p>
-            <a:pPr algn="ctr"/>
-          </a:p>
-        </p:txBody>
-      </p:sp>
-      <p:sp>
-        <p:nvSpPr>
-          <p:cNvPr id="8" name="Oval 7"/>
-          <p:cNvSpPr/>
-          <p:nvPr/>
-        </p:nvSpPr>
-        <p:spPr>
-          <a:xfrm>
-            <a:off x="2570400" y="374400"/>
-            <a:ext cx="43200" cy="43200"/>
-          </a:xfrm>
-          <a:prstGeom prst="ellipse">
-            <a:avLst/>
-          </a:prstGeom>
-          <a:solidFill>
-            <a:srgbClr val="AE4329">
-              <a:alpha val="46000"/>
-            </a:srgbClr>
-          </a:solidFill>
-          <a:ln>
-            <a:noFill/>
-          </a:ln>
-        </p:spPr>
-        <p:txBody>
-          <a:bodyPr rtlCol="0" anchor="ctr"/>
-          <a:lstStyle/>
-          <a:p>
-            <a:pPr algn="ctr"/>
-          </a:p>
-        </p:txBody>
-      </p:sp>
-      <p:sp>
-        <p:nvSpPr>
-          <p:cNvPr id="9" name="Oval 8"/>
-          <p:cNvSpPr/>
-          <p:nvPr/>
-        </p:nvSpPr>
-        <p:spPr>
-          <a:xfrm>
-            <a:off x="2570400" y="482400"/>
-            <a:ext cx="43200" cy="43200"/>
-          </a:xfrm>
-          <a:prstGeom prst="ellipse">
-            <a:avLst/>
-          </a:prstGeom>
-          <a:solidFill>
-            <a:srgbClr val="AE4329">
-              <a:alpha val="34000"/>
-            </a:srgbClr>
-          </a:solidFill>
-          <a:ln>
-            <a:noFill/>
-          </a:ln>
-        </p:spPr>
-        <p:txBody>
-          <a:bodyPr rtlCol="0" anchor="ctr"/>
-          <a:lstStyle/>
-          <a:p>
-            <a:pPr algn="ctr"/>
-          </a:p>
-        </p:txBody>
-      </p:sp>
-      <p:sp>
-        <p:nvSpPr>
-          <p:cNvPr id="10" name="Oval 9"/>
-          <p:cNvSpPr/>
-          <p:nvPr/>
-        </p:nvSpPr>
-        <p:spPr>
-          <a:xfrm>
-            <a:off x="2678400" y="158400"/>
-            <a:ext cx="43200" cy="43200"/>
-          </a:xfrm>
-          <a:prstGeom prst="ellipse">
-            <a:avLst/>
-          </a:prstGeom>
-          <a:solidFill>
-            <a:srgbClr val="AE4329">
-              <a:alpha val="70000"/>
-            </a:srgbClr>
-          </a:solidFill>
-          <a:ln>
-            <a:noFill/>
-          </a:ln>
-        </p:spPr>
-        <p:txBody>
-          <a:bodyPr rtlCol="0" anchor="ctr"/>
-          <a:lstStyle/>
-          <a:p>
-            <a:pPr algn="ctr"/>
-          </a:p>
-        </p:txBody>
-      </p:sp>
-      <p:sp>
-        <p:nvSpPr>
-          <p:cNvPr id="11" name="Oval 10"/>
-          <p:cNvSpPr/>
-          <p:nvPr/>
-        </p:nvSpPr>
-        <p:spPr>
-          <a:xfrm>
-            <a:off x="2678400" y="266400"/>
-            <a:ext cx="43200" cy="43200"/>
-          </a:xfrm>
-          <a:prstGeom prst="ellipse">
-            <a:avLst/>
-          </a:prstGeom>
-          <a:solidFill>
-            <a:srgbClr val="AE4329">
-              <a:alpha val="57999"/>
-            </a:srgbClr>
-          </a:solidFill>
-          <a:ln>
-            <a:noFill/>
-          </a:ln>
-        </p:spPr>
-        <p:txBody>
-          <a:bodyPr rtlCol="0" anchor="ctr"/>
-          <a:lstStyle/>
-          <a:p>
-            <a:pPr algn="ctr"/>
-          </a:p>
-        </p:txBody>
-      </p:sp>
-      <p:sp>
-        <p:nvSpPr>
-          <p:cNvPr id="12" name="Oval 11"/>
-          <p:cNvSpPr/>
-          <p:nvPr/>
-        </p:nvSpPr>
-        <p:spPr>
-          <a:xfrm>
-            <a:off x="2678400" y="374400"/>
-            <a:ext cx="43200" cy="43200"/>
-          </a:xfrm>
-          <a:prstGeom prst="ellipse">
-            <a:avLst/>
-          </a:prstGeom>
-          <a:solidFill>
-            <a:srgbClr val="AE4329">
-              <a:alpha val="46000"/>
-            </a:srgbClr>
-          </a:solidFill>
-          <a:ln>
-            <a:noFill/>
-          </a:ln>
-        </p:spPr>
-        <p:txBody>
-          <a:bodyPr rtlCol="0" anchor="ctr"/>
-          <a:lstStyle/>
-          <a:p>
-            <a:pPr algn="ctr"/>
-          </a:p>
-        </p:txBody>
-      </p:sp>
-      <p:sp>
-        <p:nvSpPr>
-          <p:cNvPr id="13" name="Oval 12"/>
-          <p:cNvSpPr/>
-          <p:nvPr/>
-        </p:nvSpPr>
-        <p:spPr>
-          <a:xfrm>
-            <a:off x="2678400" y="482400"/>
-            <a:ext cx="43200" cy="43200"/>
-          </a:xfrm>
-          <a:prstGeom prst="ellipse">
-            <a:avLst/>
-          </a:prstGeom>
-          <a:solidFill>
-            <a:srgbClr val="AE4329">
-              <a:alpha val="34000"/>
-            </a:srgbClr>
-          </a:solidFill>
-          <a:ln>
-            <a:noFill/>
-          </a:ln>
-        </p:spPr>
-        <p:txBody>
-          <a:bodyPr rtlCol="0" anchor="ctr"/>
-          <a:lstStyle/>
-          <a:p>
-            <a:pPr algn="ctr"/>
-          </a:p>
-        </p:txBody>
-      </p:sp>
-      <p:sp>
-        <p:nvSpPr>
-          <p:cNvPr id="14" name="Oval 13"/>
-          <p:cNvSpPr/>
-          <p:nvPr/>
-        </p:nvSpPr>
-        <p:spPr>
-          <a:xfrm>
-            <a:off x="2786400" y="158400"/>
-            <a:ext cx="43200" cy="43200"/>
-          </a:xfrm>
-          <a:prstGeom prst="ellipse">
-            <a:avLst/>
-          </a:prstGeom>
-          <a:solidFill>
-            <a:srgbClr val="AE4329">
-              <a:alpha val="70000"/>
-            </a:srgbClr>
-          </a:solidFill>
-          <a:ln>
-            <a:noFill/>
-          </a:ln>
-        </p:spPr>
-        <p:txBody>
-          <a:bodyPr rtlCol="0" anchor="ctr"/>
-          <a:lstStyle/>
-          <a:p>
-            <a:pPr algn="ctr"/>
-          </a:p>
-        </p:txBody>
-      </p:sp>
-      <p:sp>
-        <p:nvSpPr>
-          <p:cNvPr id="15" name="Oval 14"/>
-          <p:cNvSpPr/>
-          <p:nvPr/>
-        </p:nvSpPr>
-        <p:spPr>
-          <a:xfrm>
-            <a:off x="2786400" y="266400"/>
-            <a:ext cx="43200" cy="43200"/>
-          </a:xfrm>
-          <a:prstGeom prst="ellipse">
-            <a:avLst/>
-          </a:prstGeom>
-          <a:solidFill>
-            <a:srgbClr val="AE4329">
-              <a:alpha val="57999"/>
-            </a:srgbClr>
-          </a:solidFill>
-          <a:ln>
-            <a:noFill/>
-          </a:ln>
-        </p:spPr>
-        <p:txBody>
-          <a:bodyPr rtlCol="0" anchor="ctr"/>
-          <a:lstStyle/>
-          <a:p>
-            <a:pPr algn="ctr"/>
-          </a:p>
-        </p:txBody>
-      </p:sp>
-      <p:sp>
-        <p:nvSpPr>
-          <p:cNvPr id="16" name="Oval 15"/>
-          <p:cNvSpPr/>
-          <p:nvPr/>
-        </p:nvSpPr>
-        <p:spPr>
-          <a:xfrm>
-            <a:off x="2786400" y="374400"/>
-            <a:ext cx="43200" cy="43200"/>
-          </a:xfrm>
-          <a:prstGeom prst="ellipse">
-            <a:avLst/>
-          </a:prstGeom>
-          <a:solidFill>
-            <a:srgbClr val="AE4329">
-              <a:alpha val="46000"/>
-            </a:srgbClr>
-          </a:solidFill>
-          <a:ln>
-            <a:noFill/>
-          </a:ln>
-        </p:spPr>
-        <p:txBody>
-          <a:bodyPr rtlCol="0" anchor="ctr"/>
-          <a:lstStyle/>
-          <a:p>
-            <a:pPr algn="ctr"/>
-          </a:p>
-        </p:txBody>
-      </p:sp>
-      <p:sp>
-        <p:nvSpPr>
-          <p:cNvPr id="17" name="Oval 16"/>
-          <p:cNvSpPr/>
-          <p:nvPr/>
-        </p:nvSpPr>
-        <p:spPr>
-          <a:xfrm>
-            <a:off x="2786400" y="482400"/>
-            <a:ext cx="43200" cy="43200"/>
-          </a:xfrm>
-          <a:prstGeom prst="ellipse">
-            <a:avLst/>
-          </a:prstGeom>
-          <a:solidFill>
-            <a:srgbClr val="AE4329">
-              <a:alpha val="34000"/>
-            </a:srgbClr>
-          </a:solidFill>
-          <a:ln>
-            <a:noFill/>
-          </a:ln>
-        </p:spPr>
-        <p:txBody>
-          <a:bodyPr rtlCol="0" anchor="ctr"/>
-          <a:lstStyle/>
-          <a:p>
-            <a:pPr algn="ctr"/>
-          </a:p>
-        </p:txBody>
-      </p:sp>
-      <p:sp>
-        <p:nvSpPr>
-          <p:cNvPr id="18" name="Oval 17"/>
-          <p:cNvSpPr/>
-          <p:nvPr/>
-        </p:nvSpPr>
-        <p:spPr>
-          <a:xfrm>
-            <a:off x="2894400" y="158400"/>
-            <a:ext cx="43200" cy="43200"/>
-          </a:xfrm>
-          <a:prstGeom prst="ellipse">
-            <a:avLst/>
-          </a:prstGeom>
-          <a:solidFill>
-            <a:srgbClr val="AE4329">
-              <a:alpha val="70000"/>
-            </a:srgbClr>
-          </a:solidFill>
-          <a:ln>
-            <a:noFill/>
-          </a:ln>
-        </p:spPr>
-        <p:txBody>
-          <a:bodyPr rtlCol="0" anchor="ctr"/>
-          <a:lstStyle/>
-          <a:p>
-            <a:pPr algn="ctr"/>
-          </a:p>
-        </p:txBody>
-      </p:sp>
-      <p:sp>
-        <p:nvSpPr>
-          <p:cNvPr id="19" name="Oval 18"/>
-          <p:cNvSpPr/>
-          <p:nvPr/>
-        </p:nvSpPr>
-        <p:spPr>
-          <a:xfrm>
-            <a:off x="2894400" y="266400"/>
-            <a:ext cx="43200" cy="43200"/>
-          </a:xfrm>
-          <a:prstGeom prst="ellipse">
-            <a:avLst/>
-          </a:prstGeom>
-          <a:solidFill>
-            <a:srgbClr val="AE4329">
-              <a:alpha val="57999"/>
-            </a:srgbClr>
-          </a:solidFill>
-          <a:ln>
-            <a:noFill/>
-          </a:ln>
-        </p:spPr>
-        <p:txBody>
-          <a:bodyPr rtlCol="0" anchor="ctr"/>
-          <a:lstStyle/>
-          <a:p>
-            <a:pPr algn="ctr"/>
-          </a:p>
-        </p:txBody>
-      </p:sp>
-      <p:sp>
-        <p:nvSpPr>
-          <p:cNvPr id="20" name="Oval 19"/>
-          <p:cNvSpPr/>
-          <p:nvPr/>
-        </p:nvSpPr>
-        <p:spPr>
-          <a:xfrm>
-            <a:off x="2894400" y="374400"/>
-            <a:ext cx="43200" cy="43200"/>
-          </a:xfrm>
-          <a:prstGeom prst="ellipse">
-            <a:avLst/>
-          </a:prstGeom>
-          <a:solidFill>
-            <a:srgbClr val="AE4329">
-              <a:alpha val="46000"/>
-            </a:srgbClr>
-          </a:solidFill>
-          <a:ln>
-            <a:noFill/>
-          </a:ln>
-        </p:spPr>
-        <p:txBody>
-          <a:bodyPr rtlCol="0" anchor="ctr"/>
-          <a:lstStyle/>
-          <a:p>
-            <a:pPr algn="ctr"/>
-          </a:p>
-        </p:txBody>
-      </p:sp>
-      <p:sp>
-        <p:nvSpPr>
-          <p:cNvPr id="21" name="Oval 20"/>
-          <p:cNvSpPr/>
-          <p:nvPr/>
-        </p:nvSpPr>
-        <p:spPr>
-          <a:xfrm>
-            <a:off x="2894400" y="482400"/>
-            <a:ext cx="43200" cy="43200"/>
-          </a:xfrm>
-          <a:prstGeom prst="ellipse">
-            <a:avLst/>
-          </a:prstGeom>
-          <a:solidFill>
-            <a:srgbClr val="AE4329">
-              <a:alpha val="34000"/>
-            </a:srgbClr>
-          </a:solidFill>
-          <a:ln>
-            <a:noFill/>
-          </a:ln>
-        </p:spPr>
-        <p:txBody>
-          <a:bodyPr rtlCol="0" anchor="ctr"/>
-          <a:lstStyle/>
-          <a:p>
-            <a:pPr algn="ctr"/>
-          </a:p>
-        </p:txBody>
-      </p:sp>
-      <p:sp>
-        <p:nvSpPr>
-          <p:cNvPr id="22" name="Rectangle 21"/>
-          <p:cNvSpPr/>
-          <p:nvPr/>
-        </p:nvSpPr>
-        <p:spPr>
-          <a:xfrm>
-            <a:off x="0" y="1663200"/>
-            <a:ext cx="3240000" cy="136800"/>
-          </a:xfrm>
-          <a:prstGeom prst="rect">
-            <a:avLst/>
-          </a:prstGeom>
-          <a:solidFill>
-            <a:srgbClr val="AE4329"/>
-          </a:solidFill>
-          <a:ln>
-            <a:noFill/>
-          </a:ln>
-        </p:spPr>
-        <p:txBody>
-          <a:bodyPr rtlCol="0" anchor="ctr"/>
-          <a:lstStyle/>
-          <a:p>
-            <a:pPr algn="ctr"/>
-          </a:p>
-        </p:txBody>
-      </p:sp>
-      <p:sp>
-        <p:nvSpPr>
-          <p:cNvPr id="23" name="Rectangle 22"/>
-          <p:cNvSpPr/>
-          <p:nvPr/>
-        </p:nvSpPr>
-        <p:spPr>
-          <a:xfrm>
-            <a:off x="0" y="1663200"/>
-            <a:ext cx="936000" cy="136800"/>
-          </a:xfrm>
-          <a:prstGeom prst="rect">
-            <a:avLst/>
-          </a:prstGeom>
-          <a:solidFill>
-            <a:srgbClr val="F8E1DB"/>
-          </a:solidFill>
-          <a:ln>
-            <a:noFill/>
-          </a:ln>
-        </p:spPr>
-        <p:txBody>
-          <a:bodyPr rtlCol="0" anchor="ctr"/>
-          <a:lstStyle/>
-          <a:p>
-            <a:pPr algn="ctr"/>
-          </a:p>
-        </p:txBody>
-      </p:sp>
-      <p:sp>
-        <p:nvSpPr>
-          <p:cNvPr id="24" name="텍스트"/>
-          <p:cNvSpPr txBox="1"/>
-          <p:nvPr/>
-        </p:nvSpPr>
-        <p:spPr>
-          <a:xfrm>
-            <a:off x="252000" y="208800"/>
-            <a:ext cx="1800000" cy="100800"/>
+            <a:off x="1584000" y="36000"/>
+            <a:ext cx="1656000" cy="1728000"/>
           </a:xfrm>
           <a:prstGeom prst="rect">
             <a:avLst/>
@@ -3792,39 +3114,39 @@
           <a:noFill/>
         </p:spPr>
         <p:txBody>
-          <a:bodyPr wrap="square" lIns="0" rIns="0" tIns="0" bIns="0" anchor="t">
+          <a:bodyPr wrap="square" lIns="0" rIns="0" tIns="0" bIns="0" anchor="ctr">
             <a:spAutoFit/>
           </a:bodyPr>
           <a:lstStyle/>
           <a:p>
-            <a:pPr algn="l">
+            <a:pPr algn="ctr">
               <a:lnSpc>
-                <a:spcPts val="1087"/>
+                <a:spcPts val="18560"/>
               </a:lnSpc>
             </a:pPr>
             <a:r>
-              <a:rPr sz="750" b="1" spc="150">
+              <a:rPr sz="12800" b="1">
                 <a:solidFill>
-                  <a:srgbClr val="8C665C"/>
+                  <a:srgbClr val="26292D"/>
                 </a:solidFill>
                 <a:latin typeface="맑은 고딕"/>
                 <a:ea typeface="맑은 고딕"/>
               </a:rPr>
-              <a:t>의원 · 약국 이름</a:t>
-            </a:r>
-          </a:p>
-        </p:txBody>
-      </p:sp>
-      <p:sp>
-        <p:nvSpPr>
-          <p:cNvPr id="25" name="텍스트"/>
+              <a:t>마</a:t>
+            </a:r>
+          </a:p>
+        </p:txBody>
+      </p:sp>
+      <p:sp>
+        <p:nvSpPr>
+          <p:cNvPr id="3" name="텍스트"/>
           <p:cNvSpPr txBox="1"/>
           <p:nvPr/>
         </p:nvSpPr>
         <p:spPr>
           <a:xfrm>
-            <a:off x="252000" y="540000"/>
-            <a:ext cx="2016000" cy="313692"/>
+            <a:off x="252000" y="223200"/>
+            <a:ext cx="1440000" cy="133351"/>
           </a:xfrm>
           <a:prstGeom prst="rect">
             <a:avLst/>
@@ -3839,32 +3161,32 @@
           <a:p>
             <a:pPr algn="l">
               <a:lnSpc>
-                <a:spcPts val="2755"/>
+                <a:spcPts val="1015"/>
               </a:lnSpc>
             </a:pPr>
             <a:r>
-              <a:rPr sz="1900" b="1" spc="50">
+              <a:rPr sz="700" b="1" spc="200">
                 <a:solidFill>
-                  <a:srgbClr val="5B2315"/>
+                  <a:srgbClr val="A3A9B5"/>
                 </a:solidFill>
-                <a:latin typeface="바탕"/>
-                <a:ea typeface="바탕"/>
+                <a:latin typeface="맑은 고딕"/>
+                <a:ea typeface="맑은 고딕"/>
               </a:rPr>
-              <a:t>마시현</a:t>
-            </a:r>
-          </a:p>
-        </p:txBody>
-      </p:sp>
-      <p:sp>
-        <p:nvSpPr>
-          <p:cNvPr id="26" name="텍스트"/>
+              <a:t>의원 · 약국 이름</a:t>
+            </a:r>
+          </a:p>
+        </p:txBody>
+      </p:sp>
+      <p:sp>
+        <p:nvSpPr>
+          <p:cNvPr id="4" name="텍스트"/>
           <p:cNvSpPr txBox="1"/>
           <p:nvPr/>
         </p:nvSpPr>
         <p:spPr>
           <a:xfrm>
-            <a:off x="252000" y="828000"/>
-            <a:ext cx="2016000" cy="122400"/>
+            <a:off x="252000" y="604800"/>
+            <a:ext cx="1656000" cy="360000"/>
           </a:xfrm>
           <a:prstGeom prst="rect">
             <a:avLst/>
@@ -3879,32 +3201,32 @@
           <a:p>
             <a:pPr algn="l">
               <a:lnSpc>
-                <a:spcPts val="1232"/>
+                <a:spcPts val="3190"/>
               </a:lnSpc>
             </a:pPr>
             <a:r>
-              <a:rPr sz="850" b="1">
+              <a:rPr sz="2200" b="1">
                 <a:solidFill>
-                  <a:srgbClr val="AE4329"/>
+                  <a:srgbClr val="FFFFFF"/>
                 </a:solidFill>
                 <a:latin typeface="맑은 고딕"/>
                 <a:ea typeface="맑은 고딕"/>
               </a:rPr>
-              <a:t>영양사</a:t>
-            </a:r>
-          </a:p>
-        </p:txBody>
-      </p:sp>
-      <p:sp>
-        <p:nvSpPr>
-          <p:cNvPr id="27" name="텍스트"/>
+              <a:t>마시현</a:t>
+            </a:r>
+          </a:p>
+        </p:txBody>
+      </p:sp>
+      <p:sp>
+        <p:nvSpPr>
+          <p:cNvPr id="5" name="텍스트"/>
           <p:cNvSpPr txBox="1"/>
           <p:nvPr/>
         </p:nvSpPr>
         <p:spPr>
           <a:xfrm>
-            <a:off x="252000" y="1108800"/>
-            <a:ext cx="122400" cy="168911"/>
+            <a:off x="252000" y="1008000"/>
+            <a:ext cx="1656000" cy="171451"/>
           </a:xfrm>
           <a:prstGeom prst="rect">
             <a:avLst/>
@@ -3919,32 +3241,61 @@
           <a:p>
             <a:pPr algn="l">
               <a:lnSpc>
-                <a:spcPts val="1015"/>
+                <a:spcPts val="1305"/>
               </a:lnSpc>
             </a:pPr>
             <a:r>
-              <a:rPr sz="700" b="1">
+              <a:rPr sz="900" b="0">
                 <a:solidFill>
-                  <a:srgbClr val="AE4329"/>
+                  <a:srgbClr val="A3A9B5"/>
                 </a:solidFill>
                 <a:latin typeface="맑은 고딕"/>
                 <a:ea typeface="맑은 고딕"/>
               </a:rPr>
-              <a:t>T</a:t>
-            </a:r>
-          </a:p>
-        </p:txBody>
-      </p:sp>
-      <p:sp>
-        <p:nvSpPr>
-          <p:cNvPr id="28" name="텍스트"/>
+              <a:t>영양사</a:t>
+            </a:r>
+          </a:p>
+        </p:txBody>
+      </p:sp>
+      <p:sp>
+        <p:nvSpPr>
+          <p:cNvPr id="6" name="Rectangle 5"/>
+          <p:cNvSpPr/>
+          <p:nvPr/>
+        </p:nvSpPr>
+        <p:spPr>
+          <a:xfrm>
+            <a:off x="252000" y="1231200"/>
+            <a:ext cx="144000" cy="18000"/>
+          </a:xfrm>
+          <a:prstGeom prst="rect">
+            <a:avLst/>
+          </a:prstGeom>
+          <a:solidFill>
+            <a:srgbClr val="6C82AF"/>
+          </a:solidFill>
+          <a:ln>
+            <a:noFill/>
+          </a:ln>
+        </p:spPr>
+        <p:txBody>
+          <a:bodyPr rtlCol="0" anchor="ctr"/>
+          <a:lstStyle/>
+          <a:p>
+            <a:pPr algn="ctr"/>
+          </a:p>
+        </p:txBody>
+      </p:sp>
+      <p:sp>
+        <p:nvSpPr>
+          <p:cNvPr id="7" name="텍스트"/>
           <p:cNvSpPr txBox="1"/>
           <p:nvPr/>
         </p:nvSpPr>
         <p:spPr>
           <a:xfrm>
-            <a:off x="396000" y="1108800"/>
-            <a:ext cx="1584000" cy="168911"/>
+            <a:off x="252000" y="1350000"/>
+            <a:ext cx="331200" cy="99061"/>
           </a:xfrm>
           <a:prstGeom prst="rect">
             <a:avLst/>
@@ -3959,32 +3310,32 @@
           <a:p>
             <a:pPr algn="l">
               <a:lnSpc>
-                <a:spcPts val="1015"/>
+                <a:spcPts val="754"/>
               </a:lnSpc>
             </a:pPr>
             <a:r>
-              <a:rPr sz="700" b="0">
+              <a:rPr sz="520" b="1" spc="120">
                 <a:solidFill>
-                  <a:srgbClr val="5B2315"/>
+                  <a:srgbClr val="A3A9B5"/>
                 </a:solidFill>
                 <a:latin typeface="맑은 고딕"/>
                 <a:ea typeface="맑은 고딕"/>
               </a:rPr>
-              <a:t>010-1234-5678</a:t>
-            </a:r>
-          </a:p>
-        </p:txBody>
-      </p:sp>
-      <p:sp>
-        <p:nvSpPr>
-          <p:cNvPr id="29" name="텍스트"/>
+              <a:t>TEL</a:t>
+            </a:r>
+          </a:p>
+        </p:txBody>
+      </p:sp>
+      <p:sp>
+        <p:nvSpPr>
+          <p:cNvPr id="8" name="텍스트"/>
           <p:cNvSpPr txBox="1"/>
           <p:nvPr/>
         </p:nvSpPr>
         <p:spPr>
           <a:xfrm>
-            <a:off x="252000" y="1277711"/>
-            <a:ext cx="122400" cy="168911"/>
+            <a:off x="583200" y="1339200"/>
+            <a:ext cx="1296000" cy="129541"/>
           </a:xfrm>
           <a:prstGeom prst="rect">
             <a:avLst/>
@@ -3999,32 +3350,32 @@
           <a:p>
             <a:pPr algn="l">
               <a:lnSpc>
-                <a:spcPts val="1015"/>
+                <a:spcPts val="986"/>
               </a:lnSpc>
             </a:pPr>
             <a:r>
-              <a:rPr sz="700" b="1">
+              <a:rPr sz="680" b="0">
                 <a:solidFill>
-                  <a:srgbClr val="AE4329"/>
+                  <a:srgbClr val="FFFFFF"/>
                 </a:solidFill>
                 <a:latin typeface="맑은 고딕"/>
                 <a:ea typeface="맑은 고딕"/>
               </a:rPr>
-              <a:t>E</a:t>
-            </a:r>
-          </a:p>
-        </p:txBody>
-      </p:sp>
-      <p:sp>
-        <p:nvSpPr>
-          <p:cNvPr id="30" name="텍스트"/>
+              <a:t>010-1234-5678</a:t>
+            </a:r>
+          </a:p>
+        </p:txBody>
+      </p:sp>
+      <p:sp>
+        <p:nvSpPr>
+          <p:cNvPr id="9" name="텍스트"/>
           <p:cNvSpPr txBox="1"/>
           <p:nvPr/>
         </p:nvSpPr>
         <p:spPr>
           <a:xfrm>
-            <a:off x="396000" y="1277711"/>
-            <a:ext cx="1584000" cy="168911"/>
+            <a:off x="252000" y="1472400"/>
+            <a:ext cx="331200" cy="99061"/>
           </a:xfrm>
           <a:prstGeom prst="rect">
             <a:avLst/>
@@ -4039,32 +3390,32 @@
           <a:p>
             <a:pPr algn="l">
               <a:lnSpc>
-                <a:spcPts val="1015"/>
+                <a:spcPts val="754"/>
               </a:lnSpc>
             </a:pPr>
             <a:r>
-              <a:rPr sz="700" b="0">
+              <a:rPr sz="520" b="1" spc="120">
                 <a:solidFill>
-                  <a:srgbClr val="5B2315"/>
+                  <a:srgbClr val="A3A9B5"/>
                 </a:solidFill>
                 <a:latin typeface="맑은 고딕"/>
                 <a:ea typeface="맑은 고딕"/>
               </a:rPr>
-              <a:t>name@example.com</a:t>
-            </a:r>
-          </a:p>
-        </p:txBody>
-      </p:sp>
-      <p:sp>
-        <p:nvSpPr>
-          <p:cNvPr id="31" name="텍스트"/>
+              <a:t>MAIL</a:t>
+            </a:r>
+          </a:p>
+        </p:txBody>
+      </p:sp>
+      <p:sp>
+        <p:nvSpPr>
+          <p:cNvPr id="10" name="텍스트"/>
           <p:cNvSpPr txBox="1"/>
           <p:nvPr/>
         </p:nvSpPr>
         <p:spPr>
           <a:xfrm>
-            <a:off x="252000" y="1446622"/>
-            <a:ext cx="122400" cy="168911"/>
+            <a:off x="583200" y="1461600"/>
+            <a:ext cx="1296000" cy="129541"/>
           </a:xfrm>
           <a:prstGeom prst="rect">
             <a:avLst/>
@@ -4079,32 +3430,32 @@
           <a:p>
             <a:pPr algn="l">
               <a:lnSpc>
-                <a:spcPts val="1015"/>
+                <a:spcPts val="986"/>
               </a:lnSpc>
             </a:pPr>
             <a:r>
-              <a:rPr sz="700" b="1">
+              <a:rPr sz="680" b="0">
                 <a:solidFill>
-                  <a:srgbClr val="AE4329"/>
+                  <a:srgbClr val="FFFFFF"/>
                 </a:solidFill>
                 <a:latin typeface="맑은 고딕"/>
                 <a:ea typeface="맑은 고딕"/>
               </a:rPr>
-              <a:t>A</a:t>
-            </a:r>
-          </a:p>
-        </p:txBody>
-      </p:sp>
-      <p:sp>
-        <p:nvSpPr>
-          <p:cNvPr id="32" name="텍스트"/>
+              <a:t>name@example.com</a:t>
+            </a:r>
+          </a:p>
+        </p:txBody>
+      </p:sp>
+      <p:sp>
+        <p:nvSpPr>
+          <p:cNvPr id="11" name="텍스트"/>
           <p:cNvSpPr txBox="1"/>
           <p:nvPr/>
         </p:nvSpPr>
         <p:spPr>
           <a:xfrm>
-            <a:off x="396000" y="1446622"/>
-            <a:ext cx="1584000" cy="168911"/>
+            <a:off x="252000" y="1594800"/>
+            <a:ext cx="331200" cy="99061"/>
           </a:xfrm>
           <a:prstGeom prst="rect">
             <a:avLst/>
@@ -4119,13 +3470,53 @@
           <a:p>
             <a:pPr algn="l">
               <a:lnSpc>
-                <a:spcPts val="1015"/>
+                <a:spcPts val="754"/>
               </a:lnSpc>
             </a:pPr>
             <a:r>
-              <a:rPr sz="700" b="0">
+              <a:rPr sz="520" b="1" spc="120">
                 <a:solidFill>
-                  <a:srgbClr val="5B2315"/>
+                  <a:srgbClr val="A3A9B5"/>
+                </a:solidFill>
+                <a:latin typeface="맑은 고딕"/>
+                <a:ea typeface="맑은 고딕"/>
+              </a:rPr>
+              <a:t>ADDR</a:t>
+            </a:r>
+          </a:p>
+        </p:txBody>
+      </p:sp>
+      <p:sp>
+        <p:nvSpPr>
+          <p:cNvPr id="12" name="텍스트"/>
+          <p:cNvSpPr txBox="1"/>
+          <p:nvPr/>
+        </p:nvSpPr>
+        <p:spPr>
+          <a:xfrm>
+            <a:off x="583200" y="1584000"/>
+            <a:ext cx="1296000" cy="129541"/>
+          </a:xfrm>
+          <a:prstGeom prst="rect">
+            <a:avLst/>
+          </a:prstGeom>
+          <a:noFill/>
+        </p:spPr>
+        <p:txBody>
+          <a:bodyPr wrap="square" lIns="0" rIns="0" tIns="0" bIns="0" anchor="t">
+            <a:spAutoFit/>
+          </a:bodyPr>
+          <a:lstStyle/>
+          <a:p>
+            <a:pPr algn="l">
+              <a:lnSpc>
+                <a:spcPts val="986"/>
+              </a:lnSpc>
+            </a:pPr>
+            <a:r>
+              <a:rPr sz="680" b="0">
+                <a:solidFill>
+                  <a:srgbClr val="FFFFFF"/>
                 </a:solidFill>
                 <a:latin typeface="맑은 고딕"/>
                 <a:ea typeface="맑은 고딕"/>
@@ -4135,56 +3526,6 @@
           </a:p>
         </p:txBody>
       </p:sp>
-      <p:sp>
-        <p:nvSpPr>
-          <p:cNvPr id="33" name="Oval 32"/>
-          <p:cNvSpPr/>
-          <p:nvPr/>
-        </p:nvSpPr>
-        <p:spPr>
-          <a:xfrm rot="2280000">
-            <a:off x="2816640" y="1067040"/>
-            <a:ext cx="126720" cy="241920"/>
-          </a:xfrm>
-          <a:prstGeom prst="ellipse">
-            <a:avLst/>
-          </a:prstGeom>
-          <a:solidFill>
-            <a:srgbClr val="AE4329"/>
-          </a:solidFill>
-          <a:ln>
-            <a:noFill/>
-          </a:ln>
-        </p:spPr>
-        <p:txBody>
-          <a:bodyPr rtlCol="0" anchor="ctr"/>
-          <a:lstStyle/>
-          <a:p>
-            <a:pPr algn="ctr"/>
-          </a:p>
-        </p:txBody>
-      </p:sp>
-      <p:cxnSp>
-        <p:nvCxnSpPr>
-          <p:cNvPr id="34" name="Connector 33"/>
-          <p:cNvCxnSpPr/>
-          <p:nvPr/>
-        </p:nvCxnSpPr>
-        <p:spPr>
-          <a:xfrm flipV="1">
-            <a:off x="2805120" y="1101600"/>
-            <a:ext cx="144000" cy="172800"/>
-          </a:xfrm>
-          <a:prstGeom prst="line">
-            <a:avLst/>
-          </a:prstGeom>
-          <a:ln w="11520">
-            <a:solidFill>
-              <a:srgbClr val="F8E1DB"/>
-            </a:solidFill>
-          </a:ln>
-        </p:spPr>
-      </p:cxnSp>
     </p:spTree>
   </p:cSld>
   <p:clrMapOvr>
@@ -4199,7 +3540,7 @@
     <p:bg>
       <p:bgPr>
         <a:solidFill>
-          <a:srgbClr val="893520"/>
+          <a:srgbClr val="0E1116"/>
         </a:solidFill>
         <a:effectLst/>
       </p:bgPr>
@@ -4219,14 +3560,14 @@
         </p:nvSpPr>
         <p:spPr>
           <a:xfrm>
-            <a:off x="0" y="0"/>
-            <a:ext cx="273600" cy="1800000"/>
+            <a:off x="2088000" y="0"/>
+            <a:ext cx="1152000" cy="1800000"/>
           </a:xfrm>
           <a:prstGeom prst="rect">
             <a:avLst/>
           </a:prstGeom>
           <a:solidFill>
-            <a:srgbClr val="F5D4CC"/>
+            <a:srgbClr val="6C82AF"/>
           </a:solidFill>
           <a:ln>
             <a:noFill/>
@@ -4247,59 +3588,38 @@
           <p:nvPr/>
         </p:nvSpPr>
         <p:spPr>
-          <a:xfrm rot="2280000">
-            <a:off x="101952" y="171072"/>
-            <a:ext cx="69696" cy="133056"/>
+          <a:xfrm>
+            <a:off x="2397600" y="633600"/>
+            <a:ext cx="532800" cy="532800"/>
           </a:xfrm>
           <a:prstGeom prst="ellipse">
             <a:avLst/>
           </a:prstGeom>
-          <a:solidFill>
-            <a:srgbClr val="595959"/>
-          </a:solidFill>
-          <a:ln>
-            <a:noFill/>
-          </a:ln>
-        </p:spPr>
-        <p:txBody>
-          <a:bodyPr rtlCol="0" anchor="ctr"/>
-          <a:lstStyle/>
-          <a:p>
-            <a:pPr algn="ctr"/>
-          </a:p>
-        </p:txBody>
-      </p:sp>
-      <p:cxnSp>
-        <p:nvCxnSpPr>
-          <p:cNvPr id="4" name="Connector 3"/>
-          <p:cNvCxnSpPr/>
-          <p:nvPr/>
-        </p:nvCxnSpPr>
-        <p:spPr>
-          <a:xfrm flipV="1">
-            <a:off x="95616" y="190080"/>
-            <a:ext cx="79200" cy="95040"/>
-          </a:xfrm>
-          <a:prstGeom prst="line">
-            <a:avLst/>
-          </a:prstGeom>
-          <a:ln w="6336">
+          <a:noFill/>
+          <a:ln w="10800">
             <a:solidFill>
-              <a:srgbClr val="C5C5C5"/>
+              <a:srgbClr val="FFFFFF"/>
             </a:solidFill>
           </a:ln>
         </p:spPr>
-      </p:cxnSp>
-      <p:sp>
-        <p:nvSpPr>
-          <p:cNvPr id="5" name="텍스트"/>
+        <p:txBody>
+          <a:bodyPr rtlCol="0" anchor="ctr"/>
+          <a:lstStyle/>
+          <a:p>
+            <a:pPr algn="ctr"/>
+          </a:p>
+        </p:txBody>
+      </p:sp>
+      <p:sp>
+        <p:nvSpPr>
+          <p:cNvPr id="4" name="텍스트"/>
           <p:cNvSpPr txBox="1"/>
           <p:nvPr/>
         </p:nvSpPr>
         <p:spPr>
           <a:xfrm>
-            <a:off x="504000" y="396000"/>
-            <a:ext cx="1800000" cy="720000"/>
+            <a:off x="2304000" y="684000"/>
+            <a:ext cx="720000" cy="432000"/>
           </a:xfrm>
           <a:prstGeom prst="rect">
             <a:avLst/>
@@ -4312,51 +3632,34 @@
           </a:bodyPr>
           <a:lstStyle/>
           <a:p>
-            <a:pPr algn="l">
+            <a:pPr algn="ctr">
               <a:lnSpc>
-                <a:spcPts val="1667"/>
+                <a:spcPts val="4350"/>
               </a:lnSpc>
             </a:pPr>
             <a:r>
-              <a:rPr sz="1150" b="1">
+              <a:rPr sz="3000" b="1">
                 <a:solidFill>
                   <a:srgbClr val="FFFFFF"/>
                 </a:solidFill>
-                <a:latin typeface="바탕"/>
-                <a:ea typeface="바탕"/>
+                <a:latin typeface="맑은 고딕"/>
+                <a:ea typeface="맑은 고딕"/>
               </a:rPr>
-              <a:t>따뜻한 말 한마디도</a:t>
-            </a:r>
-          </a:p>
-          <a:p>
-            <a:pPr algn="l">
-              <a:lnSpc>
-                <a:spcPts val="1667"/>
-              </a:lnSpc>
-            </a:pPr>
-            <a:r>
-              <a:rPr sz="1150" b="1">
-                <a:solidFill>
-                  <a:srgbClr val="FFFFFF"/>
-                </a:solidFill>
-                <a:latin typeface="바탕"/>
-                <a:ea typeface="바탕"/>
-              </a:rPr>
-              <a:t>치료입니다</a:t>
-            </a:r>
-          </a:p>
-        </p:txBody>
-      </p:sp>
-      <p:sp>
-        <p:nvSpPr>
-          <p:cNvPr id="6" name="텍스트"/>
+              <a:t>의</a:t>
+            </a:r>
+          </a:p>
+        </p:txBody>
+      </p:sp>
+      <p:sp>
+        <p:nvSpPr>
+          <p:cNvPr id="5" name="텍스트"/>
           <p:cNvSpPr txBox="1"/>
           <p:nvPr/>
         </p:nvSpPr>
         <p:spPr>
           <a:xfrm>
-            <a:off x="504000" y="1260000"/>
-            <a:ext cx="1728000" cy="108000"/>
+            <a:off x="252000" y="540000"/>
+            <a:ext cx="1620000" cy="720000"/>
           </a:xfrm>
           <a:prstGeom prst="rect">
             <a:avLst/>
@@ -4371,62 +3674,49 @@
           <a:p>
             <a:pPr algn="l">
               <a:lnSpc>
-                <a:spcPts val="1087"/>
+                <a:spcPts val="1739"/>
               </a:lnSpc>
             </a:pPr>
             <a:r>
-              <a:rPr sz="750" b="1" spc="200">
+              <a:rPr sz="1200" b="1">
                 <a:solidFill>
-                  <a:srgbClr val="D8BCB5"/>
+                  <a:srgbClr val="FFFFFF"/>
                 </a:solidFill>
                 <a:latin typeface="맑은 고딕"/>
                 <a:ea typeface="맑은 고딕"/>
               </a:rPr>
-              <a:t>의원 · 약국 이름</a:t>
-            </a:r>
-          </a:p>
-        </p:txBody>
-      </p:sp>
-      <p:sp>
-        <p:nvSpPr>
-          <p:cNvPr id="7" name="Rectangle 6"/>
-          <p:cNvSpPr/>
+              <a:t>따뜻한 말 한마디도</a:t>
+            </a:r>
+          </a:p>
+          <a:p>
+            <a:pPr algn="l">
+              <a:lnSpc>
+                <a:spcPts val="1739"/>
+              </a:lnSpc>
+            </a:pPr>
+            <a:r>
+              <a:rPr sz="1200" b="1">
+                <a:solidFill>
+                  <a:srgbClr val="FFFFFF"/>
+                </a:solidFill>
+                <a:latin typeface="맑은 고딕"/>
+                <a:ea typeface="맑은 고딕"/>
+              </a:rPr>
+              <a:t>치료입니다</a:t>
+            </a:r>
+          </a:p>
+        </p:txBody>
+      </p:sp>
+      <p:sp>
+        <p:nvSpPr>
+          <p:cNvPr id="6" name="텍스트"/>
+          <p:cNvSpPr txBox="1"/>
           <p:nvPr/>
         </p:nvSpPr>
         <p:spPr>
           <a:xfrm>
-            <a:off x="2520000" y="216000"/>
-            <a:ext cx="468000" cy="468000"/>
-          </a:xfrm>
-          <a:prstGeom prst="rect">
-            <a:avLst/>
-          </a:prstGeom>
-          <a:noFill/>
-          <a:ln w="9000">
-            <a:solidFill>
-              <a:srgbClr val="F5D4CC"/>
-            </a:solidFill>
-            <a:prstDash val="dash"/>
-          </a:ln>
-        </p:spPr>
-        <p:txBody>
-          <a:bodyPr rtlCol="0" anchor="ctr"/>
-          <a:lstStyle/>
-          <a:p>
-            <a:pPr algn="ctr"/>
-          </a:p>
-        </p:txBody>
-      </p:sp>
-      <p:sp>
-        <p:nvSpPr>
-          <p:cNvPr id="8" name="텍스트"/>
-          <p:cNvSpPr txBox="1"/>
-          <p:nvPr/>
-        </p:nvSpPr>
-        <p:spPr>
-          <a:xfrm>
-            <a:off x="2520000" y="216000"/>
-            <a:ext cx="468000" cy="468000"/>
+            <a:off x="252000" y="1512000"/>
+            <a:ext cx="1584000" cy="123826"/>
           </a:xfrm>
           <a:prstGeom prst="rect">
             <a:avLst/>
@@ -4434,25 +3724,25 @@
           <a:noFill/>
         </p:spPr>
         <p:txBody>
-          <a:bodyPr wrap="square" lIns="0" rIns="0" tIns="0" bIns="0" anchor="ctr">
+          <a:bodyPr wrap="square" lIns="0" rIns="0" tIns="0" bIns="0" anchor="t">
             <a:spAutoFit/>
           </a:bodyPr>
           <a:lstStyle/>
           <a:p>
-            <a:pPr algn="ctr">
+            <a:pPr algn="l">
               <a:lnSpc>
-                <a:spcPts val="1305"/>
+                <a:spcPts val="942"/>
               </a:lnSpc>
             </a:pPr>
             <a:r>
-              <a:rPr sz="900" b="1">
+              <a:rPr sz="650" b="1" spc="200">
                 <a:solidFill>
-                  <a:srgbClr val="D8BCB5"/>
+                  <a:srgbClr val="A3A9B5"/>
                 </a:solidFill>
                 <a:latin typeface="맑은 고딕"/>
                 <a:ea typeface="맑은 고딕"/>
               </a:rPr>
-              <a:t>QR</a:t>
+              <a:t>의원 · 약국 이름</a:t>
             </a:r>
           </a:p>
         </p:txBody>

--- a/public/fun/cards/care/care-40.pptx
+++ b/public/fun/cards/care/care-40.pptx
@@ -3099,54 +3099,673 @@
       <p:grpSpPr/>
       <p:sp>
         <p:nvSpPr>
-          <p:cNvPr id="2" name="텍스트"/>
+          <p:cNvPr id="2" name="Rectangle 1"/>
+          <p:cNvSpPr/>
+          <p:nvPr/>
+        </p:nvSpPr>
+        <p:spPr>
+          <a:xfrm>
+            <a:off x="2016000" y="0"/>
+            <a:ext cx="1224000" cy="756000"/>
+          </a:xfrm>
+          <a:prstGeom prst="rect">
+            <a:avLst/>
+          </a:prstGeom>
+          <a:solidFill>
+            <a:srgbClr val="6C82AF"/>
+          </a:solidFill>
+          <a:ln>
+            <a:noFill/>
+          </a:ln>
+        </p:spPr>
+        <p:txBody>
+          <a:bodyPr rtlCol="0" anchor="ctr"/>
+          <a:lstStyle/>
+          <a:p>
+            <a:pPr algn="ctr"/>
+          </a:p>
+        </p:txBody>
+      </p:sp>
+      <p:cxnSp>
+        <p:nvCxnSpPr>
+          <p:cNvPr id="3" name="Connector 2"/>
+          <p:cNvCxnSpPr/>
+          <p:nvPr/>
+        </p:nvCxnSpPr>
+        <p:spPr>
+          <a:xfrm flipV="1">
+            <a:off x="2016000" y="0"/>
+            <a:ext cx="64800" cy="64800"/>
+          </a:xfrm>
+          <a:prstGeom prst="line">
+            <a:avLst/>
+          </a:prstGeom>
+          <a:ln w="3600">
+            <a:solidFill>
+              <a:srgbClr val="FFFFFF"/>
+            </a:solidFill>
+          </a:ln>
+        </p:spPr>
+      </p:cxnSp>
+      <p:cxnSp>
+        <p:nvCxnSpPr>
+          <p:cNvPr id="4" name="Connector 3"/>
+          <p:cNvCxnSpPr/>
+          <p:nvPr/>
+        </p:nvCxnSpPr>
+        <p:spPr>
+          <a:xfrm flipV="1">
+            <a:off x="2016000" y="0"/>
+            <a:ext cx="129600" cy="129600"/>
+          </a:xfrm>
+          <a:prstGeom prst="line">
+            <a:avLst/>
+          </a:prstGeom>
+          <a:ln w="3600">
+            <a:solidFill>
+              <a:srgbClr val="FFFFFF"/>
+            </a:solidFill>
+          </a:ln>
+        </p:spPr>
+      </p:cxnSp>
+      <p:cxnSp>
+        <p:nvCxnSpPr>
+          <p:cNvPr id="5" name="Connector 4"/>
+          <p:cNvCxnSpPr/>
+          <p:nvPr/>
+        </p:nvCxnSpPr>
+        <p:spPr>
+          <a:xfrm flipV="1">
+            <a:off x="2016000" y="0"/>
+            <a:ext cx="194400" cy="194400"/>
+          </a:xfrm>
+          <a:prstGeom prst="line">
+            <a:avLst/>
+          </a:prstGeom>
+          <a:ln w="3600">
+            <a:solidFill>
+              <a:srgbClr val="FFFFFF"/>
+            </a:solidFill>
+          </a:ln>
+        </p:spPr>
+      </p:cxnSp>
+      <p:cxnSp>
+        <p:nvCxnSpPr>
+          <p:cNvPr id="6" name="Connector 5"/>
+          <p:cNvCxnSpPr/>
+          <p:nvPr/>
+        </p:nvCxnSpPr>
+        <p:spPr>
+          <a:xfrm flipV="1">
+            <a:off x="2016000" y="0"/>
+            <a:ext cx="259200" cy="259200"/>
+          </a:xfrm>
+          <a:prstGeom prst="line">
+            <a:avLst/>
+          </a:prstGeom>
+          <a:ln w="3600">
+            <a:solidFill>
+              <a:srgbClr val="FFFFFF"/>
+            </a:solidFill>
+          </a:ln>
+        </p:spPr>
+      </p:cxnSp>
+      <p:cxnSp>
+        <p:nvCxnSpPr>
+          <p:cNvPr id="7" name="Connector 6"/>
+          <p:cNvCxnSpPr/>
+          <p:nvPr/>
+        </p:nvCxnSpPr>
+        <p:spPr>
+          <a:xfrm flipV="1">
+            <a:off x="2016000" y="0"/>
+            <a:ext cx="324000" cy="324000"/>
+          </a:xfrm>
+          <a:prstGeom prst="line">
+            <a:avLst/>
+          </a:prstGeom>
+          <a:ln w="3600">
+            <a:solidFill>
+              <a:srgbClr val="FFFFFF"/>
+            </a:solidFill>
+          </a:ln>
+        </p:spPr>
+      </p:cxnSp>
+      <p:cxnSp>
+        <p:nvCxnSpPr>
+          <p:cNvPr id="8" name="Connector 7"/>
+          <p:cNvCxnSpPr/>
+          <p:nvPr/>
+        </p:nvCxnSpPr>
+        <p:spPr>
+          <a:xfrm flipV="1">
+            <a:off x="2016000" y="0"/>
+            <a:ext cx="388800" cy="388800"/>
+          </a:xfrm>
+          <a:prstGeom prst="line">
+            <a:avLst/>
+          </a:prstGeom>
+          <a:ln w="3600">
+            <a:solidFill>
+              <a:srgbClr val="FFFFFF"/>
+            </a:solidFill>
+          </a:ln>
+        </p:spPr>
+      </p:cxnSp>
+      <p:cxnSp>
+        <p:nvCxnSpPr>
+          <p:cNvPr id="9" name="Connector 8"/>
+          <p:cNvCxnSpPr/>
+          <p:nvPr/>
+        </p:nvCxnSpPr>
+        <p:spPr>
+          <a:xfrm flipV="1">
+            <a:off x="2016000" y="0"/>
+            <a:ext cx="453600" cy="453600"/>
+          </a:xfrm>
+          <a:prstGeom prst="line">
+            <a:avLst/>
+          </a:prstGeom>
+          <a:ln w="3600">
+            <a:solidFill>
+              <a:srgbClr val="FFFFFF"/>
+            </a:solidFill>
+          </a:ln>
+        </p:spPr>
+      </p:cxnSp>
+      <p:cxnSp>
+        <p:nvCxnSpPr>
+          <p:cNvPr id="10" name="Connector 9"/>
+          <p:cNvCxnSpPr/>
+          <p:nvPr/>
+        </p:nvCxnSpPr>
+        <p:spPr>
+          <a:xfrm flipV="1">
+            <a:off x="2016000" y="0"/>
+            <a:ext cx="518400" cy="518400"/>
+          </a:xfrm>
+          <a:prstGeom prst="line">
+            <a:avLst/>
+          </a:prstGeom>
+          <a:ln w="3600">
+            <a:solidFill>
+              <a:srgbClr val="FFFFFF"/>
+            </a:solidFill>
+          </a:ln>
+        </p:spPr>
+      </p:cxnSp>
+      <p:cxnSp>
+        <p:nvCxnSpPr>
+          <p:cNvPr id="11" name="Connector 10"/>
+          <p:cNvCxnSpPr/>
+          <p:nvPr/>
+        </p:nvCxnSpPr>
+        <p:spPr>
+          <a:xfrm flipV="1">
+            <a:off x="2016000" y="0"/>
+            <a:ext cx="583200" cy="583200"/>
+          </a:xfrm>
+          <a:prstGeom prst="line">
+            <a:avLst/>
+          </a:prstGeom>
+          <a:ln w="3600">
+            <a:solidFill>
+              <a:srgbClr val="FFFFFF"/>
+            </a:solidFill>
+          </a:ln>
+        </p:spPr>
+      </p:cxnSp>
+      <p:cxnSp>
+        <p:nvCxnSpPr>
+          <p:cNvPr id="12" name="Connector 11"/>
+          <p:cNvCxnSpPr/>
+          <p:nvPr/>
+        </p:nvCxnSpPr>
+        <p:spPr>
+          <a:xfrm flipV="1">
+            <a:off x="2016000" y="0"/>
+            <a:ext cx="648000" cy="648000"/>
+          </a:xfrm>
+          <a:prstGeom prst="line">
+            <a:avLst/>
+          </a:prstGeom>
+          <a:ln w="3600">
+            <a:solidFill>
+              <a:srgbClr val="FFFFFF"/>
+            </a:solidFill>
+          </a:ln>
+        </p:spPr>
+      </p:cxnSp>
+      <p:cxnSp>
+        <p:nvCxnSpPr>
+          <p:cNvPr id="13" name="Connector 12"/>
+          <p:cNvCxnSpPr/>
+          <p:nvPr/>
+        </p:nvCxnSpPr>
+        <p:spPr>
+          <a:xfrm flipV="1">
+            <a:off x="2016000" y="0"/>
+            <a:ext cx="712800" cy="712800"/>
+          </a:xfrm>
+          <a:prstGeom prst="line">
+            <a:avLst/>
+          </a:prstGeom>
+          <a:ln w="3600">
+            <a:solidFill>
+              <a:srgbClr val="FFFFFF"/>
+            </a:solidFill>
+          </a:ln>
+        </p:spPr>
+      </p:cxnSp>
+      <p:cxnSp>
+        <p:nvCxnSpPr>
+          <p:cNvPr id="14" name="Connector 13"/>
+          <p:cNvCxnSpPr/>
+          <p:nvPr/>
+        </p:nvCxnSpPr>
+        <p:spPr>
+          <a:xfrm flipV="1">
+            <a:off x="2037600" y="0"/>
+            <a:ext cx="756000" cy="756000"/>
+          </a:xfrm>
+          <a:prstGeom prst="line">
+            <a:avLst/>
+          </a:prstGeom>
+          <a:ln w="3600">
+            <a:solidFill>
+              <a:srgbClr val="FFFFFF"/>
+            </a:solidFill>
+          </a:ln>
+        </p:spPr>
+      </p:cxnSp>
+      <p:cxnSp>
+        <p:nvCxnSpPr>
+          <p:cNvPr id="15" name="Connector 14"/>
+          <p:cNvCxnSpPr/>
+          <p:nvPr/>
+        </p:nvCxnSpPr>
+        <p:spPr>
+          <a:xfrm flipV="1">
+            <a:off x="2102400" y="0"/>
+            <a:ext cx="756000" cy="756000"/>
+          </a:xfrm>
+          <a:prstGeom prst="line">
+            <a:avLst/>
+          </a:prstGeom>
+          <a:ln w="3600">
+            <a:solidFill>
+              <a:srgbClr val="FFFFFF"/>
+            </a:solidFill>
+          </a:ln>
+        </p:spPr>
+      </p:cxnSp>
+      <p:cxnSp>
+        <p:nvCxnSpPr>
+          <p:cNvPr id="16" name="Connector 15"/>
+          <p:cNvCxnSpPr/>
+          <p:nvPr/>
+        </p:nvCxnSpPr>
+        <p:spPr>
+          <a:xfrm flipV="1">
+            <a:off x="2167200" y="0"/>
+            <a:ext cx="756000" cy="756000"/>
+          </a:xfrm>
+          <a:prstGeom prst="line">
+            <a:avLst/>
+          </a:prstGeom>
+          <a:ln w="3600">
+            <a:solidFill>
+              <a:srgbClr val="FFFFFF"/>
+            </a:solidFill>
+          </a:ln>
+        </p:spPr>
+      </p:cxnSp>
+      <p:cxnSp>
+        <p:nvCxnSpPr>
+          <p:cNvPr id="17" name="Connector 16"/>
+          <p:cNvCxnSpPr/>
+          <p:nvPr/>
+        </p:nvCxnSpPr>
+        <p:spPr>
+          <a:xfrm flipV="1">
+            <a:off x="2232000" y="0"/>
+            <a:ext cx="756000" cy="756000"/>
+          </a:xfrm>
+          <a:prstGeom prst="line">
+            <a:avLst/>
+          </a:prstGeom>
+          <a:ln w="3600">
+            <a:solidFill>
+              <a:srgbClr val="FFFFFF"/>
+            </a:solidFill>
+          </a:ln>
+        </p:spPr>
+      </p:cxnSp>
+      <p:cxnSp>
+        <p:nvCxnSpPr>
+          <p:cNvPr id="18" name="Connector 17"/>
+          <p:cNvCxnSpPr/>
+          <p:nvPr/>
+        </p:nvCxnSpPr>
+        <p:spPr>
+          <a:xfrm flipV="1">
+            <a:off x="2296800" y="0"/>
+            <a:ext cx="756000" cy="756000"/>
+          </a:xfrm>
+          <a:prstGeom prst="line">
+            <a:avLst/>
+          </a:prstGeom>
+          <a:ln w="3600">
+            <a:solidFill>
+              <a:srgbClr val="FFFFFF"/>
+            </a:solidFill>
+          </a:ln>
+        </p:spPr>
+      </p:cxnSp>
+      <p:cxnSp>
+        <p:nvCxnSpPr>
+          <p:cNvPr id="19" name="Connector 18"/>
+          <p:cNvCxnSpPr/>
+          <p:nvPr/>
+        </p:nvCxnSpPr>
+        <p:spPr>
+          <a:xfrm flipV="1">
+            <a:off x="2361600" y="0"/>
+            <a:ext cx="756000" cy="756000"/>
+          </a:xfrm>
+          <a:prstGeom prst="line">
+            <a:avLst/>
+          </a:prstGeom>
+          <a:ln w="3600">
+            <a:solidFill>
+              <a:srgbClr val="FFFFFF"/>
+            </a:solidFill>
+          </a:ln>
+        </p:spPr>
+      </p:cxnSp>
+      <p:cxnSp>
+        <p:nvCxnSpPr>
+          <p:cNvPr id="20" name="Connector 19"/>
+          <p:cNvCxnSpPr/>
+          <p:nvPr/>
+        </p:nvCxnSpPr>
+        <p:spPr>
+          <a:xfrm flipV="1">
+            <a:off x="2426400" y="0"/>
+            <a:ext cx="756000" cy="756000"/>
+          </a:xfrm>
+          <a:prstGeom prst="line">
+            <a:avLst/>
+          </a:prstGeom>
+          <a:ln w="3600">
+            <a:solidFill>
+              <a:srgbClr val="FFFFFF"/>
+            </a:solidFill>
+          </a:ln>
+        </p:spPr>
+      </p:cxnSp>
+      <p:cxnSp>
+        <p:nvCxnSpPr>
+          <p:cNvPr id="21" name="Connector 20"/>
+          <p:cNvCxnSpPr/>
+          <p:nvPr/>
+        </p:nvCxnSpPr>
+        <p:spPr>
+          <a:xfrm flipV="1">
+            <a:off x="2491200" y="7200"/>
+            <a:ext cx="748800" cy="748800"/>
+          </a:xfrm>
+          <a:prstGeom prst="line">
+            <a:avLst/>
+          </a:prstGeom>
+          <a:ln w="3600">
+            <a:solidFill>
+              <a:srgbClr val="FFFFFF"/>
+            </a:solidFill>
+          </a:ln>
+        </p:spPr>
+      </p:cxnSp>
+      <p:cxnSp>
+        <p:nvCxnSpPr>
+          <p:cNvPr id="22" name="Connector 21"/>
+          <p:cNvCxnSpPr/>
+          <p:nvPr/>
+        </p:nvCxnSpPr>
+        <p:spPr>
+          <a:xfrm flipV="1">
+            <a:off x="2556000" y="72000"/>
+            <a:ext cx="684000" cy="684000"/>
+          </a:xfrm>
+          <a:prstGeom prst="line">
+            <a:avLst/>
+          </a:prstGeom>
+          <a:ln w="3600">
+            <a:solidFill>
+              <a:srgbClr val="FFFFFF"/>
+            </a:solidFill>
+          </a:ln>
+        </p:spPr>
+      </p:cxnSp>
+      <p:cxnSp>
+        <p:nvCxnSpPr>
+          <p:cNvPr id="23" name="Connector 22"/>
+          <p:cNvCxnSpPr/>
+          <p:nvPr/>
+        </p:nvCxnSpPr>
+        <p:spPr>
+          <a:xfrm flipV="1">
+            <a:off x="2620800" y="136800"/>
+            <a:ext cx="619200" cy="619200"/>
+          </a:xfrm>
+          <a:prstGeom prst="line">
+            <a:avLst/>
+          </a:prstGeom>
+          <a:ln w="3600">
+            <a:solidFill>
+              <a:srgbClr val="FFFFFF"/>
+            </a:solidFill>
+          </a:ln>
+        </p:spPr>
+      </p:cxnSp>
+      <p:cxnSp>
+        <p:nvCxnSpPr>
+          <p:cNvPr id="24" name="Connector 23"/>
+          <p:cNvCxnSpPr/>
+          <p:nvPr/>
+        </p:nvCxnSpPr>
+        <p:spPr>
+          <a:xfrm flipV="1">
+            <a:off x="2685600" y="201600"/>
+            <a:ext cx="554400" cy="554400"/>
+          </a:xfrm>
+          <a:prstGeom prst="line">
+            <a:avLst/>
+          </a:prstGeom>
+          <a:ln w="3600">
+            <a:solidFill>
+              <a:srgbClr val="FFFFFF"/>
+            </a:solidFill>
+          </a:ln>
+        </p:spPr>
+      </p:cxnSp>
+      <p:cxnSp>
+        <p:nvCxnSpPr>
+          <p:cNvPr id="25" name="Connector 24"/>
+          <p:cNvCxnSpPr/>
+          <p:nvPr/>
+        </p:nvCxnSpPr>
+        <p:spPr>
+          <a:xfrm flipV="1">
+            <a:off x="2750400" y="266400"/>
+            <a:ext cx="489600" cy="489600"/>
+          </a:xfrm>
+          <a:prstGeom prst="line">
+            <a:avLst/>
+          </a:prstGeom>
+          <a:ln w="3600">
+            <a:solidFill>
+              <a:srgbClr val="FFFFFF"/>
+            </a:solidFill>
+          </a:ln>
+        </p:spPr>
+      </p:cxnSp>
+      <p:cxnSp>
+        <p:nvCxnSpPr>
+          <p:cNvPr id="26" name="Connector 25"/>
+          <p:cNvCxnSpPr/>
+          <p:nvPr/>
+        </p:nvCxnSpPr>
+        <p:spPr>
+          <a:xfrm flipV="1">
+            <a:off x="2815200" y="331200"/>
+            <a:ext cx="424800" cy="424800"/>
+          </a:xfrm>
+          <a:prstGeom prst="line">
+            <a:avLst/>
+          </a:prstGeom>
+          <a:ln w="3600">
+            <a:solidFill>
+              <a:srgbClr val="FFFFFF"/>
+            </a:solidFill>
+          </a:ln>
+        </p:spPr>
+      </p:cxnSp>
+      <p:cxnSp>
+        <p:nvCxnSpPr>
+          <p:cNvPr id="27" name="Connector 26"/>
+          <p:cNvCxnSpPr/>
+          <p:nvPr/>
+        </p:nvCxnSpPr>
+        <p:spPr>
+          <a:xfrm flipV="1">
+            <a:off x="2880000" y="396000"/>
+            <a:ext cx="360000" cy="360000"/>
+          </a:xfrm>
+          <a:prstGeom prst="line">
+            <a:avLst/>
+          </a:prstGeom>
+          <a:ln w="3600">
+            <a:solidFill>
+              <a:srgbClr val="FFFFFF"/>
+            </a:solidFill>
+          </a:ln>
+        </p:spPr>
+      </p:cxnSp>
+      <p:cxnSp>
+        <p:nvCxnSpPr>
+          <p:cNvPr id="28" name="Connector 27"/>
+          <p:cNvCxnSpPr/>
+          <p:nvPr/>
+        </p:nvCxnSpPr>
+        <p:spPr>
+          <a:xfrm flipV="1">
+            <a:off x="2944800" y="460800"/>
+            <a:ext cx="295200" cy="295200"/>
+          </a:xfrm>
+          <a:prstGeom prst="line">
+            <a:avLst/>
+          </a:prstGeom>
+          <a:ln w="3600">
+            <a:solidFill>
+              <a:srgbClr val="FFFFFF"/>
+            </a:solidFill>
+          </a:ln>
+        </p:spPr>
+      </p:cxnSp>
+      <p:cxnSp>
+        <p:nvCxnSpPr>
+          <p:cNvPr id="29" name="Connector 28"/>
+          <p:cNvCxnSpPr/>
+          <p:nvPr/>
+        </p:nvCxnSpPr>
+        <p:spPr>
+          <a:xfrm flipV="1">
+            <a:off x="3009600" y="525600"/>
+            <a:ext cx="230400" cy="230400"/>
+          </a:xfrm>
+          <a:prstGeom prst="line">
+            <a:avLst/>
+          </a:prstGeom>
+          <a:ln w="3600">
+            <a:solidFill>
+              <a:srgbClr val="FFFFFF"/>
+            </a:solidFill>
+          </a:ln>
+        </p:spPr>
+      </p:cxnSp>
+      <p:cxnSp>
+        <p:nvCxnSpPr>
+          <p:cNvPr id="30" name="Connector 29"/>
+          <p:cNvCxnSpPr/>
+          <p:nvPr/>
+        </p:nvCxnSpPr>
+        <p:spPr>
+          <a:xfrm flipV="1">
+            <a:off x="3074400" y="590400"/>
+            <a:ext cx="165600" cy="165600"/>
+          </a:xfrm>
+          <a:prstGeom prst="line">
+            <a:avLst/>
+          </a:prstGeom>
+          <a:ln w="3600">
+            <a:solidFill>
+              <a:srgbClr val="FFFFFF"/>
+            </a:solidFill>
+          </a:ln>
+        </p:spPr>
+      </p:cxnSp>
+      <p:cxnSp>
+        <p:nvCxnSpPr>
+          <p:cNvPr id="31" name="Connector 30"/>
+          <p:cNvCxnSpPr/>
+          <p:nvPr/>
+        </p:nvCxnSpPr>
+        <p:spPr>
+          <a:xfrm flipV="1">
+            <a:off x="3139200" y="655200"/>
+            <a:ext cx="100800" cy="100800"/>
+          </a:xfrm>
+          <a:prstGeom prst="line">
+            <a:avLst/>
+          </a:prstGeom>
+          <a:ln w="3600">
+            <a:solidFill>
+              <a:srgbClr val="FFFFFF"/>
+            </a:solidFill>
+          </a:ln>
+        </p:spPr>
+      </p:cxnSp>
+      <p:cxnSp>
+        <p:nvCxnSpPr>
+          <p:cNvPr id="32" name="Connector 31"/>
+          <p:cNvCxnSpPr/>
+          <p:nvPr/>
+        </p:nvCxnSpPr>
+        <p:spPr>
+          <a:xfrm flipV="1">
+            <a:off x="3204000" y="720000"/>
+            <a:ext cx="36000" cy="36000"/>
+          </a:xfrm>
+          <a:prstGeom prst="line">
+            <a:avLst/>
+          </a:prstGeom>
+          <a:ln w="3600">
+            <a:solidFill>
+              <a:srgbClr val="FFFFFF"/>
+            </a:solidFill>
+          </a:ln>
+        </p:spPr>
+      </p:cxnSp>
+      <p:sp>
+        <p:nvSpPr>
+          <p:cNvPr id="33" name="텍스트"/>
           <p:cNvSpPr txBox="1"/>
           <p:nvPr/>
         </p:nvSpPr>
         <p:spPr>
           <a:xfrm>
-            <a:off x="1584000" y="36000"/>
-            <a:ext cx="1656000" cy="1728000"/>
-          </a:xfrm>
-          <a:prstGeom prst="rect">
-            <a:avLst/>
-          </a:prstGeom>
-          <a:noFill/>
-        </p:spPr>
-        <p:txBody>
-          <a:bodyPr wrap="square" lIns="0" rIns="0" tIns="0" bIns="0" anchor="ctr">
-            <a:spAutoFit/>
-          </a:bodyPr>
-          <a:lstStyle/>
-          <a:p>
-            <a:pPr algn="ctr">
-              <a:lnSpc>
-                <a:spcPts val="18560"/>
-              </a:lnSpc>
-            </a:pPr>
-            <a:r>
-              <a:rPr sz="12800" b="1">
-                <a:solidFill>
-                  <a:srgbClr val="26292D"/>
-                </a:solidFill>
-                <a:latin typeface="맑은 고딕"/>
-                <a:ea typeface="맑은 고딕"/>
-              </a:rPr>
-              <a:t>마</a:t>
-            </a:r>
-          </a:p>
-        </p:txBody>
-      </p:sp>
-      <p:sp>
-        <p:nvSpPr>
-          <p:cNvPr id="3" name="텍스트"/>
-          <p:cNvSpPr txBox="1"/>
-          <p:nvPr/>
-        </p:nvSpPr>
-        <p:spPr>
-          <a:xfrm>
-            <a:off x="252000" y="223200"/>
-            <a:ext cx="1440000" cy="133351"/>
+            <a:off x="252000" y="252000"/>
+            <a:ext cx="1512000" cy="123826"/>
           </a:xfrm>
           <a:prstGeom prst="rect">
             <a:avLst/>
@@ -3161,11 +3780,11 @@
           <a:p>
             <a:pPr algn="l">
               <a:lnSpc>
-                <a:spcPts val="1015"/>
+                <a:spcPts val="942"/>
               </a:lnSpc>
             </a:pPr>
             <a:r>
-              <a:rPr sz="700" b="1" spc="200">
+              <a:rPr sz="650" b="1" spc="220">
                 <a:solidFill>
                   <a:srgbClr val="A3A9B5"/>
                 </a:solidFill>
@@ -3177,16 +3796,37 @@
           </a:p>
         </p:txBody>
       </p:sp>
-      <p:sp>
-        <p:nvSpPr>
-          <p:cNvPr id="4" name="텍스트"/>
+      <p:cxnSp>
+        <p:nvCxnSpPr>
+          <p:cNvPr id="34" name="Connector 33"/>
+          <p:cNvCxnSpPr/>
+          <p:nvPr/>
+        </p:nvCxnSpPr>
+        <p:spPr>
+          <a:xfrm>
+            <a:off x="252000" y="374400"/>
+            <a:ext cx="1548000" cy="0"/>
+          </a:xfrm>
+          <a:prstGeom prst="line">
+            <a:avLst/>
+          </a:prstGeom>
+          <a:ln w="3600">
+            <a:solidFill>
+              <a:srgbClr val="2A2F38"/>
+            </a:solidFill>
+          </a:ln>
+        </p:spPr>
+      </p:cxnSp>
+      <p:sp>
+        <p:nvSpPr>
+          <p:cNvPr id="35" name="텍스트"/>
           <p:cNvSpPr txBox="1"/>
           <p:nvPr/>
         </p:nvSpPr>
         <p:spPr>
           <a:xfrm>
-            <a:off x="252000" y="604800"/>
-            <a:ext cx="1656000" cy="360000"/>
+            <a:off x="252000" y="676800"/>
+            <a:ext cx="1800000" cy="237600"/>
           </a:xfrm>
           <a:prstGeom prst="rect">
             <a:avLst/>
@@ -3201,11 +3841,11 @@
           <a:p>
             <a:pPr algn="l">
               <a:lnSpc>
-                <a:spcPts val="3190"/>
+                <a:spcPts val="1957"/>
               </a:lnSpc>
             </a:pPr>
             <a:r>
-              <a:rPr sz="2200" b="1">
+              <a:rPr sz="1350" b="1" spc="120">
                 <a:solidFill>
                   <a:srgbClr val="FFFFFF"/>
                 </a:solidFill>
@@ -3219,14 +3859,14 @@
       </p:sp>
       <p:sp>
         <p:nvSpPr>
-          <p:cNvPr id="5" name="텍스트"/>
+          <p:cNvPr id="36" name="텍스트"/>
           <p:cNvSpPr txBox="1"/>
           <p:nvPr/>
         </p:nvSpPr>
         <p:spPr>
           <a:xfrm>
-            <a:off x="252000" y="1008000"/>
-            <a:ext cx="1656000" cy="171451"/>
+            <a:off x="252000" y="928800"/>
+            <a:ext cx="1800000" cy="133351"/>
           </a:xfrm>
           <a:prstGeom prst="rect">
             <a:avLst/>
@@ -3241,11 +3881,11 @@
           <a:p>
             <a:pPr algn="l">
               <a:lnSpc>
-                <a:spcPts val="1305"/>
+                <a:spcPts val="1015"/>
               </a:lnSpc>
             </a:pPr>
             <a:r>
-              <a:rPr sz="900" b="0">
+              <a:rPr sz="700" b="0" spc="60">
                 <a:solidFill>
                   <a:srgbClr val="A3A9B5"/>
                 </a:solidFill>
@@ -3259,43 +3899,14 @@
       </p:sp>
       <p:sp>
         <p:nvSpPr>
-          <p:cNvPr id="6" name="Rectangle 5"/>
-          <p:cNvSpPr/>
+          <p:cNvPr id="37" name="텍스트"/>
+          <p:cNvSpPr txBox="1"/>
           <p:nvPr/>
         </p:nvSpPr>
         <p:spPr>
           <a:xfrm>
-            <a:off x="252000" y="1231200"/>
-            <a:ext cx="144000" cy="18000"/>
-          </a:xfrm>
-          <a:prstGeom prst="rect">
-            <a:avLst/>
-          </a:prstGeom>
-          <a:solidFill>
-            <a:srgbClr val="6C82AF"/>
-          </a:solidFill>
-          <a:ln>
-            <a:noFill/>
-          </a:ln>
-        </p:spPr>
-        <p:txBody>
-          <a:bodyPr rtlCol="0" anchor="ctr"/>
-          <a:lstStyle/>
-          <a:p>
-            <a:pPr algn="ctr"/>
-          </a:p>
-        </p:txBody>
-      </p:sp>
-      <p:sp>
-        <p:nvSpPr>
-          <p:cNvPr id="7" name="텍스트"/>
-          <p:cNvSpPr txBox="1"/>
-          <p:nvPr/>
-        </p:nvSpPr>
-        <p:spPr>
-          <a:xfrm>
-            <a:off x="252000" y="1350000"/>
-            <a:ext cx="331200" cy="99061"/>
+            <a:off x="252000" y="1339200"/>
+            <a:ext cx="900000" cy="91441"/>
           </a:xfrm>
           <a:prstGeom prst="rect">
             <a:avLst/>
@@ -3310,11 +3921,11 @@
           <a:p>
             <a:pPr algn="l">
               <a:lnSpc>
-                <a:spcPts val="754"/>
+                <a:spcPts val="696"/>
               </a:lnSpc>
             </a:pPr>
             <a:r>
-              <a:rPr sz="520" b="1" spc="120">
+              <a:rPr sz="480" b="1" spc="140">
                 <a:solidFill>
                   <a:srgbClr val="A3A9B5"/>
                 </a:solidFill>
@@ -3328,14 +3939,14 @@
       </p:sp>
       <p:sp>
         <p:nvSpPr>
-          <p:cNvPr id="8" name="텍스트"/>
+          <p:cNvPr id="38" name="텍스트"/>
           <p:cNvSpPr txBox="1"/>
           <p:nvPr/>
         </p:nvSpPr>
         <p:spPr>
           <a:xfrm>
-            <a:off x="583200" y="1339200"/>
-            <a:ext cx="1296000" cy="129541"/>
+            <a:off x="252000" y="1440000"/>
+            <a:ext cx="900000" cy="123826"/>
           </a:xfrm>
           <a:prstGeom prst="rect">
             <a:avLst/>
@@ -3350,11 +3961,11 @@
           <a:p>
             <a:pPr algn="l">
               <a:lnSpc>
-                <a:spcPts val="986"/>
+                <a:spcPts val="942"/>
               </a:lnSpc>
             </a:pPr>
             <a:r>
-              <a:rPr sz="680" b="0">
+              <a:rPr sz="650" b="0">
                 <a:solidFill>
                   <a:srgbClr val="FFFFFF"/>
                 </a:solidFill>
@@ -3366,16 +3977,37 @@
           </a:p>
         </p:txBody>
       </p:sp>
-      <p:sp>
-        <p:nvSpPr>
-          <p:cNvPr id="9" name="텍스트"/>
+      <p:cxnSp>
+        <p:nvCxnSpPr>
+          <p:cNvPr id="39" name="Connector 38"/>
+          <p:cNvCxnSpPr/>
+          <p:nvPr/>
+        </p:nvCxnSpPr>
+        <p:spPr>
+          <a:xfrm>
+            <a:off x="1072800" y="1339200"/>
+            <a:ext cx="0" cy="201600"/>
+          </a:xfrm>
+          <a:prstGeom prst="line">
+            <a:avLst/>
+          </a:prstGeom>
+          <a:ln w="3600">
+            <a:solidFill>
+              <a:srgbClr val="2A2F38"/>
+            </a:solidFill>
+          </a:ln>
+        </p:spPr>
+      </p:cxnSp>
+      <p:sp>
+        <p:nvSpPr>
+          <p:cNvPr id="40" name="텍스트"/>
           <p:cNvSpPr txBox="1"/>
           <p:nvPr/>
         </p:nvSpPr>
         <p:spPr>
           <a:xfrm>
-            <a:off x="252000" y="1472400"/>
-            <a:ext cx="331200" cy="99061"/>
+            <a:off x="1152000" y="1339200"/>
+            <a:ext cx="972000" cy="91441"/>
           </a:xfrm>
           <a:prstGeom prst="rect">
             <a:avLst/>
@@ -3390,11 +4022,11 @@
           <a:p>
             <a:pPr algn="l">
               <a:lnSpc>
-                <a:spcPts val="754"/>
+                <a:spcPts val="696"/>
               </a:lnSpc>
             </a:pPr>
             <a:r>
-              <a:rPr sz="520" b="1" spc="120">
+              <a:rPr sz="480" b="1" spc="140">
                 <a:solidFill>
                   <a:srgbClr val="A3A9B5"/>
                 </a:solidFill>
@@ -3408,14 +4040,14 @@
       </p:sp>
       <p:sp>
         <p:nvSpPr>
-          <p:cNvPr id="10" name="텍스트"/>
+          <p:cNvPr id="41" name="텍스트"/>
           <p:cNvSpPr txBox="1"/>
           <p:nvPr/>
         </p:nvSpPr>
         <p:spPr>
           <a:xfrm>
-            <a:off x="583200" y="1461600"/>
-            <a:ext cx="1296000" cy="129541"/>
+            <a:off x="1152000" y="1440000"/>
+            <a:ext cx="972000" cy="123826"/>
           </a:xfrm>
           <a:prstGeom prst="rect">
             <a:avLst/>
@@ -3430,11 +4062,11 @@
           <a:p>
             <a:pPr algn="l">
               <a:lnSpc>
-                <a:spcPts val="986"/>
+                <a:spcPts val="942"/>
               </a:lnSpc>
             </a:pPr>
             <a:r>
-              <a:rPr sz="680" b="0">
+              <a:rPr sz="650" b="0">
                 <a:solidFill>
                   <a:srgbClr val="FFFFFF"/>
                 </a:solidFill>
@@ -3446,16 +4078,37 @@
           </a:p>
         </p:txBody>
       </p:sp>
-      <p:sp>
-        <p:nvSpPr>
-          <p:cNvPr id="11" name="텍스트"/>
+      <p:cxnSp>
+        <p:nvCxnSpPr>
+          <p:cNvPr id="42" name="Connector 41"/>
+          <p:cNvCxnSpPr/>
+          <p:nvPr/>
+        </p:nvCxnSpPr>
+        <p:spPr>
+          <a:xfrm>
+            <a:off x="2044800" y="1339200"/>
+            <a:ext cx="0" cy="201600"/>
+          </a:xfrm>
+          <a:prstGeom prst="line">
+            <a:avLst/>
+          </a:prstGeom>
+          <a:ln w="3600">
+            <a:solidFill>
+              <a:srgbClr val="2A2F38"/>
+            </a:solidFill>
+          </a:ln>
+        </p:spPr>
+      </p:cxnSp>
+      <p:sp>
+        <p:nvSpPr>
+          <p:cNvPr id="43" name="텍스트"/>
           <p:cNvSpPr txBox="1"/>
           <p:nvPr/>
         </p:nvSpPr>
         <p:spPr>
           <a:xfrm>
-            <a:off x="252000" y="1594800"/>
-            <a:ext cx="331200" cy="99061"/>
+            <a:off x="2124000" y="1339200"/>
+            <a:ext cx="972000" cy="91441"/>
           </a:xfrm>
           <a:prstGeom prst="rect">
             <a:avLst/>
@@ -3470,11 +4123,11 @@
           <a:p>
             <a:pPr algn="l">
               <a:lnSpc>
-                <a:spcPts val="754"/>
+                <a:spcPts val="696"/>
               </a:lnSpc>
             </a:pPr>
             <a:r>
-              <a:rPr sz="520" b="1" spc="120">
+              <a:rPr sz="480" b="1" spc="140">
                 <a:solidFill>
                   <a:srgbClr val="A3A9B5"/>
                 </a:solidFill>
@@ -3488,14 +4141,14 @@
       </p:sp>
       <p:sp>
         <p:nvSpPr>
-          <p:cNvPr id="12" name="텍스트"/>
+          <p:cNvPr id="44" name="텍스트"/>
           <p:cNvSpPr txBox="1"/>
           <p:nvPr/>
         </p:nvSpPr>
         <p:spPr>
           <a:xfrm>
-            <a:off x="583200" y="1584000"/>
-            <a:ext cx="1296000" cy="129541"/>
+            <a:off x="2124000" y="1440000"/>
+            <a:ext cx="972000" cy="123826"/>
           </a:xfrm>
           <a:prstGeom prst="rect">
             <a:avLst/>
@@ -3510,11 +4163,11 @@
           <a:p>
             <a:pPr algn="l">
               <a:lnSpc>
-                <a:spcPts val="986"/>
+                <a:spcPts val="942"/>
               </a:lnSpc>
             </a:pPr>
             <a:r>
-              <a:rPr sz="680" b="0">
+              <a:rPr sz="650" b="0">
                 <a:solidFill>
                   <a:srgbClr val="FFFFFF"/>
                 </a:solidFill>
@@ -3560,8 +4213,8 @@
         </p:nvSpPr>
         <p:spPr>
           <a:xfrm>
-            <a:off x="2088000" y="0"/>
-            <a:ext cx="1152000" cy="1800000"/>
+            <a:off x="0" y="0"/>
+            <a:ext cx="1188000" cy="1800000"/>
           </a:xfrm>
           <a:prstGeom prst="rect">
             <a:avLst/>
@@ -3581,22 +4234,652 @@
           </a:p>
         </p:txBody>
       </p:sp>
-      <p:sp>
-        <p:nvSpPr>
-          <p:cNvPr id="3" name="Oval 2"/>
+      <p:cxnSp>
+        <p:nvCxnSpPr>
+          <p:cNvPr id="3" name="Connector 2"/>
+          <p:cNvCxnSpPr/>
+          <p:nvPr/>
+        </p:nvCxnSpPr>
+        <p:spPr>
+          <a:xfrm flipV="1">
+            <a:off x="0" y="1224000"/>
+            <a:ext cx="57600" cy="57600"/>
+          </a:xfrm>
+          <a:prstGeom prst="line">
+            <a:avLst/>
+          </a:prstGeom>
+          <a:ln w="3600">
+            <a:solidFill>
+              <a:srgbClr val="FFFFFF"/>
+            </a:solidFill>
+          </a:ln>
+        </p:spPr>
+      </p:cxnSp>
+      <p:cxnSp>
+        <p:nvCxnSpPr>
+          <p:cNvPr id="4" name="Connector 3"/>
+          <p:cNvCxnSpPr/>
+          <p:nvPr/>
+        </p:nvCxnSpPr>
+        <p:spPr>
+          <a:xfrm flipV="1">
+            <a:off x="0" y="1224000"/>
+            <a:ext cx="115200" cy="115200"/>
+          </a:xfrm>
+          <a:prstGeom prst="line">
+            <a:avLst/>
+          </a:prstGeom>
+          <a:ln w="3600">
+            <a:solidFill>
+              <a:srgbClr val="FFFFFF"/>
+            </a:solidFill>
+          </a:ln>
+        </p:spPr>
+      </p:cxnSp>
+      <p:cxnSp>
+        <p:nvCxnSpPr>
+          <p:cNvPr id="5" name="Connector 4"/>
+          <p:cNvCxnSpPr/>
+          <p:nvPr/>
+        </p:nvCxnSpPr>
+        <p:spPr>
+          <a:xfrm flipV="1">
+            <a:off x="0" y="1224000"/>
+            <a:ext cx="172800" cy="172800"/>
+          </a:xfrm>
+          <a:prstGeom prst="line">
+            <a:avLst/>
+          </a:prstGeom>
+          <a:ln w="3600">
+            <a:solidFill>
+              <a:srgbClr val="FFFFFF"/>
+            </a:solidFill>
+          </a:ln>
+        </p:spPr>
+      </p:cxnSp>
+      <p:cxnSp>
+        <p:nvCxnSpPr>
+          <p:cNvPr id="6" name="Connector 5"/>
+          <p:cNvCxnSpPr/>
+          <p:nvPr/>
+        </p:nvCxnSpPr>
+        <p:spPr>
+          <a:xfrm flipV="1">
+            <a:off x="0" y="1224000"/>
+            <a:ext cx="230400" cy="230400"/>
+          </a:xfrm>
+          <a:prstGeom prst="line">
+            <a:avLst/>
+          </a:prstGeom>
+          <a:ln w="3600">
+            <a:solidFill>
+              <a:srgbClr val="FFFFFF"/>
+            </a:solidFill>
+          </a:ln>
+        </p:spPr>
+      </p:cxnSp>
+      <p:cxnSp>
+        <p:nvCxnSpPr>
+          <p:cNvPr id="7" name="Connector 6"/>
+          <p:cNvCxnSpPr/>
+          <p:nvPr/>
+        </p:nvCxnSpPr>
+        <p:spPr>
+          <a:xfrm flipV="1">
+            <a:off x="0" y="1224000"/>
+            <a:ext cx="288000" cy="288000"/>
+          </a:xfrm>
+          <a:prstGeom prst="line">
+            <a:avLst/>
+          </a:prstGeom>
+          <a:ln w="3600">
+            <a:solidFill>
+              <a:srgbClr val="FFFFFF"/>
+            </a:solidFill>
+          </a:ln>
+        </p:spPr>
+      </p:cxnSp>
+      <p:cxnSp>
+        <p:nvCxnSpPr>
+          <p:cNvPr id="8" name="Connector 7"/>
+          <p:cNvCxnSpPr/>
+          <p:nvPr/>
+        </p:nvCxnSpPr>
+        <p:spPr>
+          <a:xfrm flipV="1">
+            <a:off x="0" y="1224000"/>
+            <a:ext cx="345600" cy="345600"/>
+          </a:xfrm>
+          <a:prstGeom prst="line">
+            <a:avLst/>
+          </a:prstGeom>
+          <a:ln w="3600">
+            <a:solidFill>
+              <a:srgbClr val="FFFFFF"/>
+            </a:solidFill>
+          </a:ln>
+        </p:spPr>
+      </p:cxnSp>
+      <p:cxnSp>
+        <p:nvCxnSpPr>
+          <p:cNvPr id="9" name="Connector 8"/>
+          <p:cNvCxnSpPr/>
+          <p:nvPr/>
+        </p:nvCxnSpPr>
+        <p:spPr>
+          <a:xfrm flipV="1">
+            <a:off x="0" y="1224000"/>
+            <a:ext cx="403200" cy="403200"/>
+          </a:xfrm>
+          <a:prstGeom prst="line">
+            <a:avLst/>
+          </a:prstGeom>
+          <a:ln w="3600">
+            <a:solidFill>
+              <a:srgbClr val="FFFFFF"/>
+            </a:solidFill>
+          </a:ln>
+        </p:spPr>
+      </p:cxnSp>
+      <p:cxnSp>
+        <p:nvCxnSpPr>
+          <p:cNvPr id="10" name="Connector 9"/>
+          <p:cNvCxnSpPr/>
+          <p:nvPr/>
+        </p:nvCxnSpPr>
+        <p:spPr>
+          <a:xfrm flipV="1">
+            <a:off x="0" y="1224000"/>
+            <a:ext cx="460800" cy="460800"/>
+          </a:xfrm>
+          <a:prstGeom prst="line">
+            <a:avLst/>
+          </a:prstGeom>
+          <a:ln w="3600">
+            <a:solidFill>
+              <a:srgbClr val="FFFFFF"/>
+            </a:solidFill>
+          </a:ln>
+        </p:spPr>
+      </p:cxnSp>
+      <p:cxnSp>
+        <p:nvCxnSpPr>
+          <p:cNvPr id="11" name="Connector 10"/>
+          <p:cNvCxnSpPr/>
+          <p:nvPr/>
+        </p:nvCxnSpPr>
+        <p:spPr>
+          <a:xfrm flipV="1">
+            <a:off x="0" y="1224000"/>
+            <a:ext cx="518400" cy="518400"/>
+          </a:xfrm>
+          <a:prstGeom prst="line">
+            <a:avLst/>
+          </a:prstGeom>
+          <a:ln w="3600">
+            <a:solidFill>
+              <a:srgbClr val="FFFFFF"/>
+            </a:solidFill>
+          </a:ln>
+        </p:spPr>
+      </p:cxnSp>
+      <p:cxnSp>
+        <p:nvCxnSpPr>
+          <p:cNvPr id="12" name="Connector 11"/>
+          <p:cNvCxnSpPr/>
+          <p:nvPr/>
+        </p:nvCxnSpPr>
+        <p:spPr>
+          <a:xfrm flipV="1">
+            <a:off x="0" y="1224000"/>
+            <a:ext cx="576000" cy="576000"/>
+          </a:xfrm>
+          <a:prstGeom prst="line">
+            <a:avLst/>
+          </a:prstGeom>
+          <a:ln w="3600">
+            <a:solidFill>
+              <a:srgbClr val="FFFFFF"/>
+            </a:solidFill>
+          </a:ln>
+        </p:spPr>
+      </p:cxnSp>
+      <p:cxnSp>
+        <p:nvCxnSpPr>
+          <p:cNvPr id="13" name="Connector 12"/>
+          <p:cNvCxnSpPr/>
+          <p:nvPr/>
+        </p:nvCxnSpPr>
+        <p:spPr>
+          <a:xfrm flipV="1">
+            <a:off x="57600" y="1224000"/>
+            <a:ext cx="576000" cy="576000"/>
+          </a:xfrm>
+          <a:prstGeom prst="line">
+            <a:avLst/>
+          </a:prstGeom>
+          <a:ln w="3600">
+            <a:solidFill>
+              <a:srgbClr val="FFFFFF"/>
+            </a:solidFill>
+          </a:ln>
+        </p:spPr>
+      </p:cxnSp>
+      <p:cxnSp>
+        <p:nvCxnSpPr>
+          <p:cNvPr id="14" name="Connector 13"/>
+          <p:cNvCxnSpPr/>
+          <p:nvPr/>
+        </p:nvCxnSpPr>
+        <p:spPr>
+          <a:xfrm flipV="1">
+            <a:off x="115200" y="1224000"/>
+            <a:ext cx="576000" cy="576000"/>
+          </a:xfrm>
+          <a:prstGeom prst="line">
+            <a:avLst/>
+          </a:prstGeom>
+          <a:ln w="3600">
+            <a:solidFill>
+              <a:srgbClr val="FFFFFF"/>
+            </a:solidFill>
+          </a:ln>
+        </p:spPr>
+      </p:cxnSp>
+      <p:cxnSp>
+        <p:nvCxnSpPr>
+          <p:cNvPr id="15" name="Connector 14"/>
+          <p:cNvCxnSpPr/>
+          <p:nvPr/>
+        </p:nvCxnSpPr>
+        <p:spPr>
+          <a:xfrm flipV="1">
+            <a:off x="172800" y="1224000"/>
+            <a:ext cx="576000" cy="576000"/>
+          </a:xfrm>
+          <a:prstGeom prst="line">
+            <a:avLst/>
+          </a:prstGeom>
+          <a:ln w="3600">
+            <a:solidFill>
+              <a:srgbClr val="FFFFFF"/>
+            </a:solidFill>
+          </a:ln>
+        </p:spPr>
+      </p:cxnSp>
+      <p:cxnSp>
+        <p:nvCxnSpPr>
+          <p:cNvPr id="16" name="Connector 15"/>
+          <p:cNvCxnSpPr/>
+          <p:nvPr/>
+        </p:nvCxnSpPr>
+        <p:spPr>
+          <a:xfrm flipV="1">
+            <a:off x="230400" y="1224000"/>
+            <a:ext cx="576000" cy="576000"/>
+          </a:xfrm>
+          <a:prstGeom prst="line">
+            <a:avLst/>
+          </a:prstGeom>
+          <a:ln w="3600">
+            <a:solidFill>
+              <a:srgbClr val="FFFFFF"/>
+            </a:solidFill>
+          </a:ln>
+        </p:spPr>
+      </p:cxnSp>
+      <p:cxnSp>
+        <p:nvCxnSpPr>
+          <p:cNvPr id="17" name="Connector 16"/>
+          <p:cNvCxnSpPr/>
+          <p:nvPr/>
+        </p:nvCxnSpPr>
+        <p:spPr>
+          <a:xfrm flipV="1">
+            <a:off x="288000" y="1224000"/>
+            <a:ext cx="576000" cy="576000"/>
+          </a:xfrm>
+          <a:prstGeom prst="line">
+            <a:avLst/>
+          </a:prstGeom>
+          <a:ln w="3600">
+            <a:solidFill>
+              <a:srgbClr val="FFFFFF"/>
+            </a:solidFill>
+          </a:ln>
+        </p:spPr>
+      </p:cxnSp>
+      <p:cxnSp>
+        <p:nvCxnSpPr>
+          <p:cNvPr id="18" name="Connector 17"/>
+          <p:cNvCxnSpPr/>
+          <p:nvPr/>
+        </p:nvCxnSpPr>
+        <p:spPr>
+          <a:xfrm flipV="1">
+            <a:off x="345600" y="1224000"/>
+            <a:ext cx="576000" cy="576000"/>
+          </a:xfrm>
+          <a:prstGeom prst="line">
+            <a:avLst/>
+          </a:prstGeom>
+          <a:ln w="3600">
+            <a:solidFill>
+              <a:srgbClr val="FFFFFF"/>
+            </a:solidFill>
+          </a:ln>
+        </p:spPr>
+      </p:cxnSp>
+      <p:cxnSp>
+        <p:nvCxnSpPr>
+          <p:cNvPr id="19" name="Connector 18"/>
+          <p:cNvCxnSpPr/>
+          <p:nvPr/>
+        </p:nvCxnSpPr>
+        <p:spPr>
+          <a:xfrm flipV="1">
+            <a:off x="403200" y="1224000"/>
+            <a:ext cx="576000" cy="576000"/>
+          </a:xfrm>
+          <a:prstGeom prst="line">
+            <a:avLst/>
+          </a:prstGeom>
+          <a:ln w="3600">
+            <a:solidFill>
+              <a:srgbClr val="FFFFFF"/>
+            </a:solidFill>
+          </a:ln>
+        </p:spPr>
+      </p:cxnSp>
+      <p:cxnSp>
+        <p:nvCxnSpPr>
+          <p:cNvPr id="20" name="Connector 19"/>
+          <p:cNvCxnSpPr/>
+          <p:nvPr/>
+        </p:nvCxnSpPr>
+        <p:spPr>
+          <a:xfrm flipV="1">
+            <a:off x="460800" y="1224000"/>
+            <a:ext cx="576000" cy="576000"/>
+          </a:xfrm>
+          <a:prstGeom prst="line">
+            <a:avLst/>
+          </a:prstGeom>
+          <a:ln w="3600">
+            <a:solidFill>
+              <a:srgbClr val="FFFFFF"/>
+            </a:solidFill>
+          </a:ln>
+        </p:spPr>
+      </p:cxnSp>
+      <p:cxnSp>
+        <p:nvCxnSpPr>
+          <p:cNvPr id="21" name="Connector 20"/>
+          <p:cNvCxnSpPr/>
+          <p:nvPr/>
+        </p:nvCxnSpPr>
+        <p:spPr>
+          <a:xfrm flipV="1">
+            <a:off x="518400" y="1224000"/>
+            <a:ext cx="576000" cy="576000"/>
+          </a:xfrm>
+          <a:prstGeom prst="line">
+            <a:avLst/>
+          </a:prstGeom>
+          <a:ln w="3600">
+            <a:solidFill>
+              <a:srgbClr val="FFFFFF"/>
+            </a:solidFill>
+          </a:ln>
+        </p:spPr>
+      </p:cxnSp>
+      <p:cxnSp>
+        <p:nvCxnSpPr>
+          <p:cNvPr id="22" name="Connector 21"/>
+          <p:cNvCxnSpPr/>
+          <p:nvPr/>
+        </p:nvCxnSpPr>
+        <p:spPr>
+          <a:xfrm flipV="1">
+            <a:off x="576000" y="1224000"/>
+            <a:ext cx="576000" cy="576000"/>
+          </a:xfrm>
+          <a:prstGeom prst="line">
+            <a:avLst/>
+          </a:prstGeom>
+          <a:ln w="3600">
+            <a:solidFill>
+              <a:srgbClr val="FFFFFF"/>
+            </a:solidFill>
+          </a:ln>
+        </p:spPr>
+      </p:cxnSp>
+      <p:cxnSp>
+        <p:nvCxnSpPr>
+          <p:cNvPr id="23" name="Connector 22"/>
+          <p:cNvCxnSpPr/>
+          <p:nvPr/>
+        </p:nvCxnSpPr>
+        <p:spPr>
+          <a:xfrm flipV="1">
+            <a:off x="633600" y="1245600"/>
+            <a:ext cx="554400" cy="554400"/>
+          </a:xfrm>
+          <a:prstGeom prst="line">
+            <a:avLst/>
+          </a:prstGeom>
+          <a:ln w="3600">
+            <a:solidFill>
+              <a:srgbClr val="FFFFFF"/>
+            </a:solidFill>
+          </a:ln>
+        </p:spPr>
+      </p:cxnSp>
+      <p:cxnSp>
+        <p:nvCxnSpPr>
+          <p:cNvPr id="24" name="Connector 23"/>
+          <p:cNvCxnSpPr/>
+          <p:nvPr/>
+        </p:nvCxnSpPr>
+        <p:spPr>
+          <a:xfrm flipV="1">
+            <a:off x="691200" y="1303200"/>
+            <a:ext cx="496800" cy="496800"/>
+          </a:xfrm>
+          <a:prstGeom prst="line">
+            <a:avLst/>
+          </a:prstGeom>
+          <a:ln w="3600">
+            <a:solidFill>
+              <a:srgbClr val="FFFFFF"/>
+            </a:solidFill>
+          </a:ln>
+        </p:spPr>
+      </p:cxnSp>
+      <p:cxnSp>
+        <p:nvCxnSpPr>
+          <p:cNvPr id="25" name="Connector 24"/>
+          <p:cNvCxnSpPr/>
+          <p:nvPr/>
+        </p:nvCxnSpPr>
+        <p:spPr>
+          <a:xfrm flipV="1">
+            <a:off x="748800" y="1360800"/>
+            <a:ext cx="439200" cy="439200"/>
+          </a:xfrm>
+          <a:prstGeom prst="line">
+            <a:avLst/>
+          </a:prstGeom>
+          <a:ln w="3600">
+            <a:solidFill>
+              <a:srgbClr val="FFFFFF"/>
+            </a:solidFill>
+          </a:ln>
+        </p:spPr>
+      </p:cxnSp>
+      <p:cxnSp>
+        <p:nvCxnSpPr>
+          <p:cNvPr id="26" name="Connector 25"/>
+          <p:cNvCxnSpPr/>
+          <p:nvPr/>
+        </p:nvCxnSpPr>
+        <p:spPr>
+          <a:xfrm flipV="1">
+            <a:off x="806400" y="1418400"/>
+            <a:ext cx="381600" cy="381600"/>
+          </a:xfrm>
+          <a:prstGeom prst="line">
+            <a:avLst/>
+          </a:prstGeom>
+          <a:ln w="3600">
+            <a:solidFill>
+              <a:srgbClr val="FFFFFF"/>
+            </a:solidFill>
+          </a:ln>
+        </p:spPr>
+      </p:cxnSp>
+      <p:cxnSp>
+        <p:nvCxnSpPr>
+          <p:cNvPr id="27" name="Connector 26"/>
+          <p:cNvCxnSpPr/>
+          <p:nvPr/>
+        </p:nvCxnSpPr>
+        <p:spPr>
+          <a:xfrm flipV="1">
+            <a:off x="864000" y="1476000"/>
+            <a:ext cx="324000" cy="324000"/>
+          </a:xfrm>
+          <a:prstGeom prst="line">
+            <a:avLst/>
+          </a:prstGeom>
+          <a:ln w="3600">
+            <a:solidFill>
+              <a:srgbClr val="FFFFFF"/>
+            </a:solidFill>
+          </a:ln>
+        </p:spPr>
+      </p:cxnSp>
+      <p:cxnSp>
+        <p:nvCxnSpPr>
+          <p:cNvPr id="28" name="Connector 27"/>
+          <p:cNvCxnSpPr/>
+          <p:nvPr/>
+        </p:nvCxnSpPr>
+        <p:spPr>
+          <a:xfrm flipV="1">
+            <a:off x="921600" y="1533600"/>
+            <a:ext cx="266400" cy="266400"/>
+          </a:xfrm>
+          <a:prstGeom prst="line">
+            <a:avLst/>
+          </a:prstGeom>
+          <a:ln w="3600">
+            <a:solidFill>
+              <a:srgbClr val="FFFFFF"/>
+            </a:solidFill>
+          </a:ln>
+        </p:spPr>
+      </p:cxnSp>
+      <p:cxnSp>
+        <p:nvCxnSpPr>
+          <p:cNvPr id="29" name="Connector 28"/>
+          <p:cNvCxnSpPr/>
+          <p:nvPr/>
+        </p:nvCxnSpPr>
+        <p:spPr>
+          <a:xfrm flipV="1">
+            <a:off x="979200" y="1591200"/>
+            <a:ext cx="208800" cy="208800"/>
+          </a:xfrm>
+          <a:prstGeom prst="line">
+            <a:avLst/>
+          </a:prstGeom>
+          <a:ln w="3600">
+            <a:solidFill>
+              <a:srgbClr val="FFFFFF"/>
+            </a:solidFill>
+          </a:ln>
+        </p:spPr>
+      </p:cxnSp>
+      <p:cxnSp>
+        <p:nvCxnSpPr>
+          <p:cNvPr id="30" name="Connector 29"/>
+          <p:cNvCxnSpPr/>
+          <p:nvPr/>
+        </p:nvCxnSpPr>
+        <p:spPr>
+          <a:xfrm flipV="1">
+            <a:off x="1036800" y="1648800"/>
+            <a:ext cx="151200" cy="151200"/>
+          </a:xfrm>
+          <a:prstGeom prst="line">
+            <a:avLst/>
+          </a:prstGeom>
+          <a:ln w="3600">
+            <a:solidFill>
+              <a:srgbClr val="FFFFFF"/>
+            </a:solidFill>
+          </a:ln>
+        </p:spPr>
+      </p:cxnSp>
+      <p:cxnSp>
+        <p:nvCxnSpPr>
+          <p:cNvPr id="31" name="Connector 30"/>
+          <p:cNvCxnSpPr/>
+          <p:nvPr/>
+        </p:nvCxnSpPr>
+        <p:spPr>
+          <a:xfrm flipV="1">
+            <a:off x="1094400" y="1706400"/>
+            <a:ext cx="93600" cy="93600"/>
+          </a:xfrm>
+          <a:prstGeom prst="line">
+            <a:avLst/>
+          </a:prstGeom>
+          <a:ln w="3600">
+            <a:solidFill>
+              <a:srgbClr val="FFFFFF"/>
+            </a:solidFill>
+          </a:ln>
+        </p:spPr>
+      </p:cxnSp>
+      <p:cxnSp>
+        <p:nvCxnSpPr>
+          <p:cNvPr id="32" name="Connector 31"/>
+          <p:cNvCxnSpPr/>
+          <p:nvPr/>
+        </p:nvCxnSpPr>
+        <p:spPr>
+          <a:xfrm flipV="1">
+            <a:off x="1152000" y="1764000"/>
+            <a:ext cx="36000" cy="36000"/>
+          </a:xfrm>
+          <a:prstGeom prst="line">
+            <a:avLst/>
+          </a:prstGeom>
+          <a:ln w="3600">
+            <a:solidFill>
+              <a:srgbClr val="FFFFFF"/>
+            </a:solidFill>
+          </a:ln>
+        </p:spPr>
+      </p:cxnSp>
+      <p:sp>
+        <p:nvSpPr>
+          <p:cNvPr id="33" name="Oval 32"/>
           <p:cNvSpPr/>
           <p:nvPr/>
         </p:nvSpPr>
         <p:spPr>
           <a:xfrm>
-            <a:off x="2397600" y="633600"/>
-            <a:ext cx="532800" cy="532800"/>
+            <a:off x="216000" y="252000"/>
+            <a:ext cx="288000" cy="288000"/>
           </a:xfrm>
           <a:prstGeom prst="ellipse">
             <a:avLst/>
           </a:prstGeom>
           <a:noFill/>
-          <a:ln w="10800">
+          <a:ln w="5760">
             <a:solidFill>
               <a:srgbClr val="FFFFFF"/>
             </a:solidFill>
@@ -3612,14 +4895,14 @@
       </p:sp>
       <p:sp>
         <p:nvSpPr>
-          <p:cNvPr id="4" name="텍스트"/>
+          <p:cNvPr id="34" name="텍스트"/>
           <p:cNvSpPr txBox="1"/>
           <p:nvPr/>
         </p:nvSpPr>
         <p:spPr>
           <a:xfrm>
-            <a:off x="2304000" y="684000"/>
-            <a:ext cx="720000" cy="432000"/>
+            <a:off x="216000" y="252000"/>
+            <a:ext cx="288000" cy="288000"/>
           </a:xfrm>
           <a:prstGeom prst="rect">
             <a:avLst/>
@@ -3634,11 +4917,11 @@
           <a:p>
             <a:pPr algn="ctr">
               <a:lnSpc>
-                <a:spcPts val="4350"/>
+                <a:spcPts val="2030"/>
               </a:lnSpc>
             </a:pPr>
             <a:r>
-              <a:rPr sz="3000" b="1">
+              <a:rPr sz="1400" b="1">
                 <a:solidFill>
                   <a:srgbClr val="FFFFFF"/>
                 </a:solidFill>
@@ -3652,14 +4935,14 @@
       </p:sp>
       <p:sp>
         <p:nvSpPr>
-          <p:cNvPr id="5" name="텍스트"/>
+          <p:cNvPr id="35" name="텍스트"/>
           <p:cNvSpPr txBox="1"/>
           <p:nvPr/>
         </p:nvSpPr>
         <p:spPr>
           <a:xfrm>
-            <a:off x="252000" y="540000"/>
-            <a:ext cx="1620000" cy="720000"/>
+            <a:off x="216000" y="1440000"/>
+            <a:ext cx="828000" cy="142876"/>
           </a:xfrm>
           <a:prstGeom prst="rect">
             <a:avLst/>
@@ -3674,49 +4957,154 @@
           <a:p>
             <a:pPr algn="l">
               <a:lnSpc>
-                <a:spcPts val="1739"/>
+                <a:spcPts val="1087"/>
               </a:lnSpc>
             </a:pPr>
             <a:r>
-              <a:rPr sz="1200" b="1">
+              <a:rPr sz="750" b="1" spc="100">
                 <a:solidFill>
                   <a:srgbClr val="FFFFFF"/>
                 </a:solidFill>
                 <a:latin typeface="맑은 고딕"/>
                 <a:ea typeface="맑은 고딕"/>
               </a:rPr>
-              <a:t>따뜻한 말 한마디도</a:t>
-            </a:r>
-          </a:p>
+              <a:t>진료 · 상담</a:t>
+            </a:r>
+          </a:p>
+        </p:txBody>
+      </p:sp>
+      <p:sp>
+        <p:nvSpPr>
+          <p:cNvPr id="36" name="텍스트"/>
+          <p:cNvSpPr txBox="1"/>
+          <p:nvPr/>
+        </p:nvSpPr>
+        <p:spPr>
+          <a:xfrm>
+            <a:off x="1440000" y="223200"/>
+            <a:ext cx="1080000" cy="99061"/>
+          </a:xfrm>
+          <a:prstGeom prst="rect">
+            <a:avLst/>
+          </a:prstGeom>
+          <a:noFill/>
+        </p:spPr>
+        <p:txBody>
+          <a:bodyPr wrap="square" lIns="0" rIns="0" tIns="0" bIns="0" anchor="t">
+            <a:spAutoFit/>
+          </a:bodyPr>
+          <a:lstStyle/>
           <a:p>
             <a:pPr algn="l">
               <a:lnSpc>
-                <a:spcPts val="1739"/>
+                <a:spcPts val="754"/>
               </a:lnSpc>
             </a:pPr>
             <a:r>
-              <a:rPr sz="1200" b="1">
+              <a:rPr sz="520" b="1" spc="240">
+                <a:solidFill>
+                  <a:srgbClr val="A3A9B5"/>
+                </a:solidFill>
+                <a:latin typeface="맑은 고딕"/>
+                <a:ea typeface="맑은 고딕"/>
+              </a:rPr>
+              <a:t>진료 · 상담</a:t>
+            </a:r>
+          </a:p>
+        </p:txBody>
+      </p:sp>
+      <p:cxnSp>
+        <p:nvCxnSpPr>
+          <p:cNvPr id="37" name="Connector 36"/>
+          <p:cNvCxnSpPr/>
+          <p:nvPr/>
+        </p:nvCxnSpPr>
+        <p:spPr>
+          <a:xfrm>
+            <a:off x="1440000" y="360000"/>
+            <a:ext cx="1548000" cy="0"/>
+          </a:xfrm>
+          <a:prstGeom prst="line">
+            <a:avLst/>
+          </a:prstGeom>
+          <a:ln w="3600">
+            <a:solidFill>
+              <a:srgbClr val="2A2F38"/>
+            </a:solidFill>
+          </a:ln>
+        </p:spPr>
+      </p:cxnSp>
+      <p:sp>
+        <p:nvSpPr>
+          <p:cNvPr id="38" name="텍스트"/>
+          <p:cNvSpPr txBox="1"/>
+          <p:nvPr/>
+        </p:nvSpPr>
+        <p:spPr>
+          <a:xfrm>
+            <a:off x="1440000" y="403200"/>
+            <a:ext cx="1296000" cy="133351"/>
+          </a:xfrm>
+          <a:prstGeom prst="rect">
+            <a:avLst/>
+          </a:prstGeom>
+          <a:noFill/>
+        </p:spPr>
+        <p:txBody>
+          <a:bodyPr wrap="square" lIns="0" rIns="0" tIns="0" bIns="0" anchor="t">
+            <a:spAutoFit/>
+          </a:bodyPr>
+          <a:lstStyle/>
+          <a:p>
+            <a:pPr algn="l">
+              <a:lnSpc>
+                <a:spcPts val="1015"/>
+              </a:lnSpc>
+            </a:pPr>
+            <a:r>
+              <a:rPr sz="700" b="0">
                 <a:solidFill>
                   <a:srgbClr val="FFFFFF"/>
                 </a:solidFill>
                 <a:latin typeface="맑은 고딕"/>
                 <a:ea typeface="맑은 고딕"/>
               </a:rPr>
-              <a:t>치료입니다</a:t>
-            </a:r>
-          </a:p>
-        </p:txBody>
-      </p:sp>
-      <p:sp>
-        <p:nvSpPr>
-          <p:cNvPr id="6" name="텍스트"/>
+              <a:t>재활 치료</a:t>
+            </a:r>
+          </a:p>
+        </p:txBody>
+      </p:sp>
+      <p:cxnSp>
+        <p:nvCxnSpPr>
+          <p:cNvPr id="39" name="Connector 38"/>
+          <p:cNvCxnSpPr/>
+          <p:nvPr/>
+        </p:nvCxnSpPr>
+        <p:spPr>
+          <a:xfrm>
+            <a:off x="1440000" y="561600"/>
+            <a:ext cx="1548000" cy="0"/>
+          </a:xfrm>
+          <a:prstGeom prst="line">
+            <a:avLst/>
+          </a:prstGeom>
+          <a:ln w="3600">
+            <a:solidFill>
+              <a:srgbClr val="2A2F38"/>
+            </a:solidFill>
+          </a:ln>
+        </p:spPr>
+      </p:cxnSp>
+      <p:sp>
+        <p:nvSpPr>
+          <p:cNvPr id="40" name="텍스트"/>
           <p:cNvSpPr txBox="1"/>
           <p:nvPr/>
         </p:nvSpPr>
         <p:spPr>
           <a:xfrm>
-            <a:off x="252000" y="1512000"/>
-            <a:ext cx="1584000" cy="123826"/>
+            <a:off x="1440000" y="604800"/>
+            <a:ext cx="1296000" cy="133351"/>
           </a:xfrm>
           <a:prstGeom prst="rect">
             <a:avLst/>
@@ -3731,18 +5119,140 @@
           <a:p>
             <a:pPr algn="l">
               <a:lnSpc>
-                <a:spcPts val="942"/>
+                <a:spcPts val="1015"/>
               </a:lnSpc>
             </a:pPr>
             <a:r>
-              <a:rPr sz="650" b="1" spc="200">
+              <a:rPr sz="700" b="0">
+                <a:solidFill>
+                  <a:srgbClr val="FFFFFF"/>
+                </a:solidFill>
+                <a:latin typeface="맑은 고딕"/>
+                <a:ea typeface="맑은 고딕"/>
+              </a:rPr>
+              <a:t>침 · 뜸</a:t>
+            </a:r>
+          </a:p>
+        </p:txBody>
+      </p:sp>
+      <p:cxnSp>
+        <p:nvCxnSpPr>
+          <p:cNvPr id="41" name="Connector 40"/>
+          <p:cNvCxnSpPr/>
+          <p:nvPr/>
+        </p:nvCxnSpPr>
+        <p:spPr>
+          <a:xfrm>
+            <a:off x="1440000" y="763200"/>
+            <a:ext cx="1548000" cy="0"/>
+          </a:xfrm>
+          <a:prstGeom prst="line">
+            <a:avLst/>
+          </a:prstGeom>
+          <a:ln w="3600">
+            <a:solidFill>
+              <a:srgbClr val="2A2F38"/>
+            </a:solidFill>
+          </a:ln>
+        </p:spPr>
+      </p:cxnSp>
+      <p:sp>
+        <p:nvSpPr>
+          <p:cNvPr id="42" name="텍스트"/>
+          <p:cNvSpPr txBox="1"/>
+          <p:nvPr/>
+        </p:nvSpPr>
+        <p:spPr>
+          <a:xfrm>
+            <a:off x="1440000" y="806400"/>
+            <a:ext cx="1296000" cy="133351"/>
+          </a:xfrm>
+          <a:prstGeom prst="rect">
+            <a:avLst/>
+          </a:prstGeom>
+          <a:noFill/>
+        </p:spPr>
+        <p:txBody>
+          <a:bodyPr wrap="square" lIns="0" rIns="0" tIns="0" bIns="0" anchor="t">
+            <a:spAutoFit/>
+          </a:bodyPr>
+          <a:lstStyle/>
+          <a:p>
+            <a:pPr algn="l">
+              <a:lnSpc>
+                <a:spcPts val="1015"/>
+              </a:lnSpc>
+            </a:pPr>
+            <a:r>
+              <a:rPr sz="700" b="0">
+                <a:solidFill>
+                  <a:srgbClr val="FFFFFF"/>
+                </a:solidFill>
+                <a:latin typeface="맑은 고딕"/>
+                <a:ea typeface="맑은 고딕"/>
+              </a:rPr>
+              <a:t>영양 상담</a:t>
+            </a:r>
+          </a:p>
+        </p:txBody>
+      </p:sp>
+      <p:cxnSp>
+        <p:nvCxnSpPr>
+          <p:cNvPr id="43" name="Connector 42"/>
+          <p:cNvCxnSpPr/>
+          <p:nvPr/>
+        </p:nvCxnSpPr>
+        <p:spPr>
+          <a:xfrm>
+            <a:off x="1440000" y="964800"/>
+            <a:ext cx="1548000" cy="0"/>
+          </a:xfrm>
+          <a:prstGeom prst="line">
+            <a:avLst/>
+          </a:prstGeom>
+          <a:ln w="3600">
+            <a:solidFill>
+              <a:srgbClr val="2A2F38"/>
+            </a:solidFill>
+          </a:ln>
+        </p:spPr>
+      </p:cxnSp>
+      <p:sp>
+        <p:nvSpPr>
+          <p:cNvPr id="44" name="텍스트"/>
+          <p:cNvSpPr txBox="1"/>
+          <p:nvPr/>
+        </p:nvSpPr>
+        <p:spPr>
+          <a:xfrm>
+            <a:off x="1440000" y="1569600"/>
+            <a:ext cx="1548000" cy="114301"/>
+          </a:xfrm>
+          <a:prstGeom prst="rect">
+            <a:avLst/>
+          </a:prstGeom>
+          <a:noFill/>
+        </p:spPr>
+        <p:txBody>
+          <a:bodyPr wrap="square" lIns="0" rIns="0" tIns="0" bIns="0" anchor="t">
+            <a:spAutoFit/>
+          </a:bodyPr>
+          <a:lstStyle/>
+          <a:p>
+            <a:pPr algn="l">
+              <a:lnSpc>
+                <a:spcPts val="869"/>
+              </a:lnSpc>
+            </a:pPr>
+            <a:r>
+              <a:rPr sz="600" b="0">
                 <a:solidFill>
                   <a:srgbClr val="A3A9B5"/>
                 </a:solidFill>
                 <a:latin typeface="맑은 고딕"/>
                 <a:ea typeface="맑은 고딕"/>
               </a:rPr>
-              <a:t>의원 · 약국 이름</a:t>
+              <a:t>토 09:00 – 13:00   |   blog.example.com</a:t>
             </a:r>
           </a:p>
         </p:txBody>
